--- a/4. Creating Custom Implementation of Task/CreatingTaskFromScratch.pptx
+++ b/4. Creating Custom Implementation of Task/CreatingTaskFromScratch.pptx
@@ -7,10 +7,10 @@
     <p:sldMasterId id="2147484523" r:id="rId6"/>
   </p:sldMasterIdLst>
   <p:notesMasterIdLst>
-    <p:notesMasterId r:id="rId22"/>
+    <p:notesMasterId r:id="rId21"/>
   </p:notesMasterIdLst>
   <p:handoutMasterIdLst>
-    <p:handoutMasterId r:id="rId23"/>
+    <p:handoutMasterId r:id="rId22"/>
   </p:handoutMasterIdLst>
   <p:sldIdLst>
     <p:sldId id="276" r:id="rId7"/>
@@ -25,9 +25,8 @@
     <p:sldId id="286" r:id="rId16"/>
     <p:sldId id="287" r:id="rId17"/>
     <p:sldId id="288" r:id="rId18"/>
-    <p:sldId id="289" r:id="rId19"/>
-    <p:sldId id="293" r:id="rId20"/>
-    <p:sldId id="294" r:id="rId21"/>
+    <p:sldId id="293" r:id="rId19"/>
+    <p:sldId id="294" r:id="rId20"/>
   </p:sldIdLst>
   <p:sldSz cx="12436475" cy="6994525"/>
   <p:notesSz cx="6858000" cy="9144000"/>
@@ -255,7 +254,7 @@
               <a:rPr lang="en-US" smtClean="0">
                 <a:latin typeface="Segoe UI" pitchFamily="34" charset="0"/>
               </a:rPr>
-              <a:t>9/13/26 8:56 PM</a:t>
+              <a:t>9/14/26 5:55 AM</a:t>
             </a:fld>
             <a:endParaRPr lang="en-US">
               <a:latin typeface="Segoe UI" pitchFamily="34" charset="0"/>
@@ -533,7 +532,7 @@
           <a:p>
             <a:fld id="{D18B56EA-E28F-4F92-9F16-7A6F2501B303}" type="datetime8">
               <a:rPr lang="en-US" smtClean="0"/>
-              <a:t>9/13/26 8:56 PM</a:t>
+              <a:t>9/14/26 5:54 AM</a:t>
             </a:fld>
             <a:endParaRPr lang="en-US"/>
           </a:p>
@@ -831,7 +830,7 @@
           </a:p>
           <a:p>
             <a:r>
-              <a:t>Now we put all of it to work. Over the next twenty minutes you will meet every building block a Task is made of: a work queue, a completion flag, a list of callbacks, a lock, a way to store an exception, a blocking wait, a timer, and the small pattern the compiler looks for when it sees the await keyword. Then you open an empty class called CustomTask and assemble them yourself.</a:t>
+              <a:t>Now we put all of it to work. Over the next twenty minutes you will meet every building block a Task is made of: a work queue, a completion flag, a list of callbacks, a lock, a way to store an exception, a blocking wait, a timer, and the small pattern the compiler looks for when it sees the await keyword. Then you open a CustomTask class whose members are only stubs and fill them in yourself.</a:t>
             </a:r>
           </a:p>
           <a:p>
@@ -839,7 +838,7 @@
           </a:p>
           <a:p>
             <a:r>
-              <a:t>Two files are already written for you in the starter project. CustomTaskAwaiter.cs is complete: it is the bridge between await and your class, and we read it together near the end of this deck. Program.cs is also complete: it already awaits CustomTask.Run() and CustomTask.Delay(), which is why the starter does not compile yet. The compiler errors are the challenge's to-do list.</a:t>
+              <a:t>Two files are already written for you in the starter project. CustomTaskAwaiter.cs is complete: it is the bridge between await and your class, and we read it together near the end of this deck. Program.cs is also complete: it calls every public member of CustomTask, and the starter still compiles because CustomTask.cs declares each of those members as a stub that throws NotImplementedException. Run it, and each exception message is a hint about what that member needs to do. The stubs are the challenge's to-do list.</a:t>
             </a:r>
           </a:p>
           <a:p>
@@ -1218,7 +1217,7 @@
           </a:p>
           <a:p>
             <a:r>
-              <a:t>Why this matters for the challenge: the moment CustomTask exposes GetAwaiter(), the top-level await statements in Program.cs compile with no changes to the compiler, no attributes and no registration.</a:t>
+              <a:t>Why this matters for the challenge: because the starter's CustomTask already declares GetAwaiter(), the top-level await statements in Program.cs compile from the start with no changes to the compiler, no attributes and no registration. They start working the moment your GetAwaiter() returns a real CustomTaskAwaiter.</a:t>
             </a:r>
           </a:p>
           <a:p>
@@ -1301,7 +1300,7 @@
           <a:lstStyle/>
           <a:p>
             <a:r>
-              <a:t>Here is the whole pattern, and it is small.</a:t>
+              <a:t>Time to switch from listening to typing.</a:t>
             </a:r>
           </a:p>
           <a:p>
@@ -1309,27 +1308,7 @@
           </a:p>
           <a:p>
             <a:r>
-              <a:t>Bullet by bullet:</a:t>
-            </a:r>
-          </a:p>
-          <a:p>
-            <a:r>
-              <a:t>• GetAwaiter() on the awaited type: an instance method, or an extension method, with no parameters. Its return type is the awaiter.</a:t>
-            </a:r>
-          </a:p>
-          <a:p>
-            <a:r>
-              <a:t>• Awaiter: IsCompleted, OnCompleted(), GetResult(): a bool property, a void method taking an Action, and a method returning void or the result. The compiler duck-types these three members. IsCompleted answers "can I keep going right now?". OnCompleted(continuation) registers the rest of the method. GetResult() returns void or the result, and rethrows if the operation faulted.</a:t>
-            </a:r>
-          </a:p>
-          <a:p>
-            <a:r>
-              <a:t>• Only OnCompleted() comes from an interface: the awaiter type must implement INotifyCompletion from System.Runtime.CompilerServices; IsCompleted and GetResult() are found by name. The interface is on the slide in full: one method.</a:t>
-            </a:r>
-          </a:p>
-          <a:p>
-            <a:r>
-              <a:t>• UnsafeOnCompleted() is an optional extra: it comes from ICriticalNotifyCompletion, which derives from INotifyCompletion, and it is the no-ExecutionContext-flow version. When an awaiter implements it, the compiler-generated code prefers it, because the async method builder already captures and restores ExecutionContext for the state machine, so the awaiter does not need to do it again. You do not need it for this challenge.</a:t>
+              <a:t>Before you open the IDE, say back to yourself what a Task is: a completion flag, a stored exception, a list of continuations, and a lock around all three. Everything you are about to write is a method that reads or writes that state.</a:t>
             </a:r>
           </a:p>
           <a:p>
@@ -1337,7 +1316,7 @@
           </a:p>
           <a:p>
             <a:r>
-              <a:t>Notice what is not in the pattern: nothing about threads, schedulers or Task. A readonly struct with three one-line members satisfies it, which is exactly what the next slide shows.</a:t>
+              <a:t>Build up to it in stages. The starter builds from the first minute, because every public member is already a stub, but running it stops at the first stub you have not replaced yet. Start with the fields and the shared completion method. Add ContinueWith(), because Wait() and the awaiter both register through it. Then Wait(), then Run(), then Delay(), then GetAwaiter(). At that point no stubs remain, and Program.cs runs all five steps as written.</a:t>
             </a:r>
           </a:p>
           <a:p>
@@ -1345,7 +1324,7 @@
           </a:p>
           <a:p>
             <a:r>
-              <a:t>Why this matters for the challenge: requirement 10 is this slide. The awaiter is written for you; understanding why those three members exist tells you what CustomTask has to provide.</a:t>
+              <a:t>Test as you go, in temporary code at the bottom of Program.cs that you delete before comparing with 2. Finish. Chain two ContinueWith() calls, then Wait() on the task the second one returned; if that Wait() never returns, the returned task is never being completed. For two waiters, and for the several-thousand-link chain, build the chain on top of CustomTask.Delay(TimeSpan.FromSeconds(1)) so nothing has completed while you are still registering. Starting from an already completed task makes the test depend on how fast the pool drains the chain behind you, and a stack overflow you cannot reproduce is worse than one you can.</a:t>
             </a:r>
           </a:p>
           <a:p>
@@ -1353,17 +1332,25 @@
           </a:p>
           <a:p>
             <a:r>
+              <a:t>Use the .NET source when you get stuck. Task.cs and TaskAwaiter.cs are the reference implementation of what you are building, and the System.Runtime.ExceptionServices using at the top of the starter CustomTask.cs is a hint.</a:t>
+            </a:r>
+          </a:p>
+          <a:p>
+            <a:endParaRPr/>
+          </a:p>
+          <a:p>
+            <a:r>
               <a:t>References:</a:t>
             </a:r>
           </a:p>
           <a:p>
             <a:r>
-              <a:t>https://github.com/dotnet/runtime/blob/main/src/libraries/System.Private.CoreLib/src/System/Runtime/CompilerServices/INotifyCompletion.cs</a:t>
-            </a:r>
-          </a:p>
-          <a:p>
-            <a:r>
-              <a:t>https://learn.microsoft.com/dotnet/csharp/language-reference/operators/await</a:t>
+              <a:t>https://github.com/dotnet/runtime/blob/main/src/libraries/System.Private.CoreLib/src/System/Threading/Tasks/Task.cs</a:t>
+            </a:r>
+          </a:p>
+          <a:p>
+            <a:r>
+              <a:t>https://github.com/dotnet/runtime/blob/main/src/libraries/System.Private.CoreLib/src/System/Runtime/CompilerServices/TaskAwaiter.cs</a:t>
             </a:r>
           </a:p>
         </p:txBody>
@@ -1433,7 +1420,7 @@
           <a:lstStyle/>
           <a:p>
             <a:r>
-              <a:t>Time to switch from listening to typing.</a:t>
+              <a:t>Forty-five minutes, with the afternoon break in the middle. Open 4. Creating Custom Implementation of Task/1. Start/CreatingTaskFromScratch.slnx and run it once. It builds, but it stops at the first NotImplementedException, and that is expected: every public member of CustomTask is already a stub, and each stub's message is a hint about what that member needs to do.</a:t>
             </a:r>
           </a:p>
           <a:p>
@@ -1441,7 +1428,7 @@
           </a:p>
           <a:p>
             <a:r>
-              <a:t>Before you open the IDE, say back to yourself what a Task is: a completion flag, a stored exception, a list of continuations, and a lock around all three. Everything you are about to write is a method that reads or writes that state.</a:t>
+              <a:t>Two files are already finished. CustomTaskAwaiter.cs is the bridge from the previous slides; read it, do not edit it. Program.cs already calls every public member of CustomTask in five numbered steps, and its comments explain what each member should do. Use it as your guide: it is what you are building towards, so finish with it exactly as you found it. Temporary test code at the bottom of it while you work is fine and expected; delete it before you compare with 2. Finish. Everything else you write goes in CustomTask.cs.</a:t>
             </a:r>
           </a:p>
           <a:p>
@@ -1449,7 +1436,7 @@
           </a:p>
           <a:p>
             <a:r>
-              <a:t>Build up to it in stages, and expect no build at all until the last one: every file in the starter references members you have not written yet. Start with the fields and the shared completion method. Add ContinueWith(), because Wait() and the awaiter both register through it. Then Wait(), then Run(), then Delay(), then GetAwaiter(). At that point Program.cs compiles as written and you can run it.</a:t>
+              <a:t>You are building Run(Action), ContinueWith(Action), Wait(), Delay(TimeSpan), IsCompleted, SetResult(), SetException() and GetAwaiter(), plus the completion state underneath them: a lock, a completed flag, a stored exception, and a list of continuations with their captured ExecutionContext.</a:t>
             </a:r>
           </a:p>
           <a:p>
@@ -1457,127 +1444,7 @@
           </a:p>
           <a:p>
             <a:r>
-              <a:t>Test as you go, in temporary code at the bottom of Program.cs that you delete before comparing with 2. Finish. Chain two ContinueWith() calls, then Wait() on the task the second one returned; if that Wait() never returns, the returned task is never being completed. For two waiters, and for the several-thousand-link chain, build the chain on top of CustomTask.Delay(TimeSpan.FromSeconds(1)) so nothing has completed while you are still registering. Starting from an already completed task makes the test depend on how fast the pool drains the chain behind you, and a stack overflow you cannot reproduce is worse than one you can.</a:t>
-            </a:r>
-          </a:p>
-          <a:p>
-            <a:endParaRPr/>
-          </a:p>
-          <a:p>
-            <a:r>
-              <a:t>Use the .NET source when you get stuck. Task.cs and TaskAwaiter.cs are the reference implementation of what you are building, and the System.Runtime.ExceptionServices using at the top of the starter CustomTask.cs is a hint.</a:t>
-            </a:r>
-          </a:p>
-          <a:p>
-            <a:endParaRPr/>
-          </a:p>
-          <a:p>
-            <a:r>
-              <a:t>References:</a:t>
-            </a:r>
-          </a:p>
-          <a:p>
-            <a:r>
-              <a:t>https://github.com/dotnet/runtime/blob/main/src/libraries/System.Private.CoreLib/src/System/Threading/Tasks/Task.cs</a:t>
-            </a:r>
-          </a:p>
-          <a:p>
-            <a:r>
-              <a:t>https://github.com/dotnet/runtime/blob/main/src/libraries/System.Private.CoreLib/src/System/Runtime/CompilerServices/TaskAwaiter.cs</a:t>
-            </a:r>
-          </a:p>
-        </p:txBody>
-      </p:sp>
-      <p:sp>
-        <p:nvSpPr>
-          <p:cNvPr id="4" name="Slide Number Placeholder 3"/>
-          <p:cNvSpPr>
-            <a:spLocks noGrp="1"/>
-          </p:cNvSpPr>
-          <p:nvPr>
-            <p:ph type="sldNum" sz="quarter" idx="5"/>
-          </p:nvPr>
-        </p:nvSpPr>
-        <p:spPr/>
-      </p:sp>
-    </p:spTree>
-  </p:cSld>
-  <p:clrMapOvr>
-    <a:masterClrMapping/>
-  </p:clrMapOvr>
-</p:notes>
-</file>
-
-<file path=ppt/notesSlides/notesSlide15.xml><?xml version="1.0" encoding="utf-8"?>
-<p:notes xmlns:a="http://schemas.openxmlformats.org/drawingml/2006/main" xmlns:r="http://schemas.openxmlformats.org/officeDocument/2006/relationships" xmlns:p="http://schemas.openxmlformats.org/presentationml/2006/main">
-  <p:cSld>
-    <p:spTree>
-      <p:nvGrpSpPr>
-        <p:cNvPr id="1" name=""/>
-        <p:cNvGrpSpPr/>
-        <p:nvPr/>
-      </p:nvGrpSpPr>
-      <p:grpSpPr>
-        <a:xfrm>
-          <a:off x="0" y="0"/>
-          <a:ext cx="0" cy="0"/>
-          <a:chOff x="0" y="0"/>
-          <a:chExt cx="0" cy="0"/>
-        </a:xfrm>
-      </p:grpSpPr>
-      <p:sp>
-        <p:nvSpPr>
-          <p:cNvPr id="2" name="Slide Image Placeholder 1"/>
-          <p:cNvSpPr>
-            <a:spLocks noGrp="1" noRot="1" noChangeAspect="1"/>
-          </p:cNvSpPr>
-          <p:nvPr>
-            <p:ph type="sldImg" idx="2"/>
-          </p:nvPr>
-        </p:nvSpPr>
-        <p:spPr/>
-      </p:sp>
-      <p:sp>
-        <p:nvSpPr>
-          <p:cNvPr id="3" name="Notes Placeholder 2"/>
-          <p:cNvSpPr>
-            <a:spLocks noGrp="1"/>
-          </p:cNvSpPr>
-          <p:nvPr>
-            <p:ph type="body" sz="quarter" idx="3"/>
-          </p:nvPr>
-        </p:nvSpPr>
-        <p:spPr/>
-        <p:txBody>
-          <a:bodyPr/>
-          <a:lstStyle/>
-          <a:p>
-            <a:r>
-              <a:t>Forty-five minutes, with the afternoon break in the middle. Open 4. Creating Custom Implementation of Task/1. Start/CreatingTaskFromScratch.slnx and build it once. It fails, and that is expected: every error names a CustomTask member that does not exist yet.</a:t>
-            </a:r>
-          </a:p>
-          <a:p>
-            <a:endParaRPr/>
-          </a:p>
-          <a:p>
-            <a:r>
-              <a:t>Two files are already finished. CustomTaskAwaiter.cs is the bridge from the previous slides; read it, do not edit it. Program.cs already awaits CustomTask.Run() and CustomTask.Delay() and prints the four thread Ids, and it is what you are building towards, so finish with it exactly as you found it. Temporary test code at the bottom of it while you work is fine and expected; delete it before you compare with 2. Finish. Everything else you write goes in CustomTask.cs.</a:t>
-            </a:r>
-          </a:p>
-          <a:p>
-            <a:endParaRPr/>
-          </a:p>
-          <a:p>
-            <a:r>
-              <a:t>You are building Run(Action), ContinueWith(Action), Wait(), Delay(TimeSpan), IsCompleted and GetAwaiter(), plus the completion state underneath them: a lock, a completed flag, a stored exception, and a list of continuations with their captured ExecutionContext.</a:t>
-            </a:r>
-          </a:p>
-          <a:p>
-            <a:endParaRPr/>
-          </a:p>
-          <a:p>
-            <a:r>
-              <a:t>You are done when the solution builds and prints the Starting Thread Id and three CustomTask Ids, a continuation runs after the first task completes, chaining ContinueWith() on the task returned by ContinueWith() does not wait forever, two callers waiting on the same incomplete task both resume, and a chain of several thousand ContinueWith() calls finishes without a stack overflow.</a:t>
+              <a:t>You are done when the solution builds and Program.cs runs all five steps with the output its comments describe, a continuation runs after the first task completes, chaining ContinueWith() on the task returned by ContinueWith() does not wait forever, two callers waiting on the same incomplete task both resume, and a chain of several thousand ContinueWith() calls finishes without a stack overflow.</a:t>
             </a:r>
           </a:p>
           <a:p>
@@ -1920,7 +1787,7 @@
           </a:p>
           <a:p>
             <a:r>
-              <a:t>Why this matters for the challenge: requirement 3 is Run(Action) on the Thread Pool, and acceptance check 2, "three CustomTask thread Ids", is the visible proof that the work left the starting thread.</a:t>
+              <a:t>Why this matters for the challenge: requirement 3 is Run(Action) on the Thread Pool, and acceptance check 2 runs Step 1 of Program.cs, where the Run() action prints a thread pool Thread Id instead of the main thread's: the visible proof that the work left the starting thread.</a:t>
             </a:r>
           </a:p>
           <a:p>
@@ -2300,7 +2167,7 @@
           </a:p>
           <a:p>
             <a:r>
-              <a:t>Why this matters for the challenge: requirements 1, 2 and 5 all meet in this one method, and it is the method the next three slides keep pointing back to.</a:t>
+              <a:t>Why this matters for the challenge: requirements 1, 2, 5 and 11 all meet in this one method, and it is the method the next three slides keep pointing back to.</a:t>
             </a:r>
           </a:p>
           <a:p>
@@ -8735,7 +8602,7 @@
         <p:spPr>
           <a:xfrm>
             <a:off x="274320" y="1627632"/>
-            <a:ext cx="5303520" cy="4636008"/>
+            <a:ext cx="10816814" cy="4636008"/>
           </a:xfrm>
         </p:spPr>
         <p:txBody>
@@ -8783,8 +8650,8 @@
         </p:blipFill>
         <p:spPr>
           <a:xfrm>
-            <a:off x="5577839" y="2255697"/>
-            <a:ext cx="6583680" cy="3215286"/>
+            <a:off x="6218237" y="3809704"/>
+            <a:ext cx="5943918" cy="2902844"/>
           </a:xfrm>
           <a:prstGeom prst="rect">
             <a:avLst/>
@@ -8882,8 +8749,8 @@
         </p:nvSpPr>
         <p:spPr>
           <a:xfrm>
-            <a:off x="274320" y="1627632"/>
-            <a:ext cx="5303520" cy="4636008"/>
+            <a:off x="274319" y="1627632"/>
+            <a:ext cx="9009529" cy="4636008"/>
           </a:xfrm>
         </p:spPr>
         <p:txBody>
@@ -8931,7 +8798,7 @@
         </p:blipFill>
         <p:spPr>
           <a:xfrm>
-            <a:off x="5577839" y="2542410"/>
+            <a:off x="5222837" y="3945636"/>
             <a:ext cx="6583680" cy="2641859"/>
           </a:xfrm>
           <a:prstGeom prst="rect">
@@ -8973,7 +8840,7 @@
         <p:spPr>
           <a:xfrm>
             <a:off x="658368" y="2011680"/>
-            <a:ext cx="11155680" cy="1371600"/>
+            <a:ext cx="11155680" cy="1107996"/>
           </a:xfrm>
           <a:prstGeom prst="rect">
             <a:avLst/>
@@ -9001,7 +8868,7 @@
                 </a:gradFill>
                 <a:latin typeface="+mj-lt"/>
               </a:rPr>
-              <a:t>Await Is Just a Pattern</a:t>
+              <a:t>Await Uses Duck Typing</a:t>
             </a:r>
           </a:p>
         </p:txBody>
@@ -9014,7 +8881,7 @@
         </p:nvSpPr>
         <p:spPr>
           <a:xfrm>
-            <a:off x="768096" y="4023360"/>
+            <a:off x="886430" y="3582297"/>
             <a:ext cx="11155680" cy="914400"/>
           </a:xfrm>
           <a:prstGeom prst="rect">
@@ -9037,6 +8904,68 @@
               </a:rPr>
               <a:t>Any Type With GetAwaiter() Can Be Awaited</a:t>
             </a:r>
+          </a:p>
+        </p:txBody>
+      </p:sp>
+      <p:sp>
+        <p:nvSpPr>
+          <p:cNvPr id="9" name="TextBox 8">
+            <a:extLst>
+              <a:ext uri="{FF2B5EF4-FFF2-40B4-BE49-F238E27FC236}">
+                <a16:creationId xmlns:a16="http://schemas.microsoft.com/office/drawing/2014/main" id="{48BE70F8-DE91-7813-7218-C48E84A30973}"/>
+              </a:ext>
+            </a:extLst>
+          </p:cNvPr>
+          <p:cNvSpPr txBox="1"/>
+          <p:nvPr/>
+        </p:nvSpPr>
+        <p:spPr>
+          <a:xfrm>
+            <a:off x="886430" y="5463099"/>
+            <a:ext cx="8498541" cy="523220"/>
+          </a:xfrm>
+          <a:prstGeom prst="rect">
+            <a:avLst/>
+          </a:prstGeom>
+          <a:noFill/>
+        </p:spPr>
+        <p:txBody>
+          <a:bodyPr wrap="square">
+            <a:spAutoFit/>
+          </a:bodyPr>
+          <a:lstStyle/>
+          <a:p>
+            <a:r>
+              <a:rPr lang="en-US" b="0" i="1" u="none" strike="noStrike" dirty="0">
+                <a:solidFill>
+                  <a:schemeClr val="tx1"/>
+                </a:solidFill>
+                <a:effectLst/>
+                <a:latin typeface="+mn-lt"/>
+              </a:rPr>
+              <a:t>If it walks like a duck and it quacks like a duck, </a:t>
+            </a:r>
+            <a:r>
+              <a:rPr lang="en-US" sz="2800" b="0" i="1" u="none" strike="noStrike" dirty="0">
+                <a:solidFill>
+                  <a:schemeClr val="tx1"/>
+                </a:solidFill>
+                <a:effectLst/>
+                <a:latin typeface="+mn-lt"/>
+              </a:rPr>
+              <a:t>then</a:t>
+            </a:r>
+            <a:r>
+              <a:rPr lang="en-US" b="0" i="1" u="none" strike="noStrike" dirty="0">
+                <a:solidFill>
+                  <a:schemeClr val="tx1"/>
+                </a:solidFill>
+                <a:effectLst/>
+                <a:latin typeface="+mn-lt"/>
+              </a:rPr>
+              <a:t> it must be a duck.</a:t>
+            </a:r>
+            <a:endParaRPr lang="en-US" i="1" dirty="0"/>
           </a:p>
         </p:txBody>
       </p:sp>
@@ -9082,112 +9011,11 @@
           <a:p>
             <a:r>
               <a:rPr lang="en-US" dirty="0"/>
-              <a:t>Awaiter Pattern</a:t>
-            </a:r>
-            <a:br>
-              <a:rPr lang="en-US" dirty="0"/>
-            </a:br>
-            <a:r>
-              <a:rPr lang="en-US" sz="3600" dirty="0">
-                <a:gradFill>
-                  <a:gsLst>
-                    <a:gs pos="1250">
-                      <a:srgbClr val="FFB900"/>
-                    </a:gs>
-                    <a:gs pos="100000">
-                      <a:srgbClr val="FFB900"/>
-                    </a:gs>
-                  </a:gsLst>
-                  <a:lin ang="5400000" scaled="0"/>
-                </a:gradFill>
-              </a:rPr>
-              <a:t>INotifyCompletion</a:t>
-            </a:r>
-            <a:endParaRPr lang="en-US" sz="4000" dirty="0">
-              <a:gradFill>
-                <a:gsLst>
-                  <a:gs pos="1250">
-                    <a:srgbClr val="FFB900"/>
-                  </a:gs>
-                  <a:gs pos="100000">
-                    <a:srgbClr val="FFB900"/>
-                  </a:gs>
-                </a:gsLst>
-                <a:lin ang="5400000" scaled="0"/>
-              </a:gradFill>
-            </a:endParaRPr>
+              <a:t>Let's Build a Task</a:t>
+            </a:r>
           </a:p>
         </p:txBody>
       </p:sp>
-      <p:sp>
-        <p:nvSpPr>
-          <p:cNvPr id="3" name="Text Placeholder 2"/>
-          <p:cNvSpPr>
-            <a:spLocks noGrp="1"/>
-          </p:cNvSpPr>
-          <p:nvPr>
-            <p:ph type="body" sz="quarter" idx="10"/>
-          </p:nvPr>
-        </p:nvSpPr>
-        <p:spPr>
-          <a:xfrm>
-            <a:off x="274320" y="1627632"/>
-            <a:ext cx="5303520" cy="4636008"/>
-          </a:xfrm>
-        </p:spPr>
-        <p:txBody>
-          <a:bodyPr/>
-          <a:lstStyle/>
-          <a:p>
-            <a:r>
-              <a:rPr lang="en-US" sz="2800" dirty="0"/>
-              <a:t>`GetAwaiter()` on the awaited type</a:t>
-            </a:r>
-          </a:p>
-          <a:p>
-            <a:r>
-              <a:rPr lang="en-US" sz="2800" dirty="0"/>
-              <a:t>Awaiter: `IsCompleted`, `OnCompleted()`, `GetResult()`</a:t>
-            </a:r>
-          </a:p>
-          <a:p>
-            <a:r>
-              <a:rPr lang="en-US" sz="2800" dirty="0"/>
-              <a:t>Only `OnCompleted()` comes from an interface</a:t>
-            </a:r>
-          </a:p>
-          <a:p>
-            <a:r>
-              <a:rPr lang="en-US" sz="2800" dirty="0"/>
-              <a:t>`UnsafeOnCompleted()` is an optional extra</a:t>
-            </a:r>
-          </a:p>
-        </p:txBody>
-      </p:sp>
-      <p:pic>
-        <p:nvPicPr>
-          <p:cNvPr id="4" name="Picture 3" descr="slide14.png"/>
-          <p:cNvPicPr>
-            <a:picLocks noChangeAspect="1"/>
-          </p:cNvPicPr>
-          <p:nvPr/>
-        </p:nvPicPr>
-        <p:blipFill>
-          <a:blip r:embed="rId3"/>
-          <a:stretch>
-            <a:fillRect/>
-          </a:stretch>
-        </p:blipFill>
-        <p:spPr>
-          <a:xfrm>
-            <a:off x="5577839" y="1459558"/>
-            <a:ext cx="6583680" cy="4807563"/>
-          </a:xfrm>
-          <a:prstGeom prst="rect">
-            <a:avLst/>
-          </a:prstGeom>
-        </p:spPr>
-      </p:pic>
     </p:spTree>
   </p:cSld>
   <p:clrMapOvr>
@@ -9230,53 +9058,6 @@
           <a:p>
             <a:r>
               <a:rPr lang="en-US" dirty="0"/>
-              <a:t>Let's Build a Task</a:t>
-            </a:r>
-          </a:p>
-        </p:txBody>
-      </p:sp>
-    </p:spTree>
-  </p:cSld>
-  <p:clrMapOvr>
-    <a:masterClrMapping/>
-  </p:clrMapOvr>
-</p:sld>
-</file>
-
-<file path=ppt/slides/slide15.xml><?xml version="1.0" encoding="utf-8"?>
-<p:sld xmlns:a="http://schemas.openxmlformats.org/drawingml/2006/main" xmlns:r="http://schemas.openxmlformats.org/officeDocument/2006/relationships" xmlns:p="http://schemas.openxmlformats.org/presentationml/2006/main">
-  <p:cSld>
-    <p:spTree>
-      <p:nvGrpSpPr>
-        <p:cNvPr id="1" name=""/>
-        <p:cNvGrpSpPr/>
-        <p:nvPr/>
-      </p:nvGrpSpPr>
-      <p:grpSpPr>
-        <a:xfrm>
-          <a:off x="0" y="0"/>
-          <a:ext cx="0" cy="0"/>
-          <a:chOff x="0" y="0"/>
-          <a:chExt cx="0" cy="0"/>
-        </a:xfrm>
-      </p:grpSpPr>
-      <p:sp>
-        <p:nvSpPr>
-          <p:cNvPr id="2" name="Title 1"/>
-          <p:cNvSpPr>
-            <a:spLocks noGrp="1"/>
-          </p:cNvSpPr>
-          <p:nvPr>
-            <p:ph type="title"/>
-          </p:nvPr>
-        </p:nvSpPr>
-        <p:spPr/>
-        <p:txBody>
-          <a:bodyPr/>
-          <a:lstStyle/>
-          <a:p>
-            <a:r>
-              <a:rPr lang="en-US" dirty="0"/>
               <a:t>Challenge: Build an Awaitable CustomTask</a:t>
             </a:r>
             <a:br>
@@ -9327,7 +9108,7 @@
         <p:spPr>
           <a:xfrm>
             <a:off x="274320" y="1627632"/>
-            <a:ext cx="11887200" cy="4636008"/>
+            <a:ext cx="11887200" cy="3594830"/>
           </a:xfrm>
         </p:spPr>
         <p:txBody>
@@ -9343,14 +9124,14 @@
             <a:pPr lvl="1"/>
             <a:r>
               <a:rPr lang="en-US" dirty="0"/>
-              <a:t>Provided: `CustomTaskAwaiter.cs` and `Program.cs`</a:t>
+              <a:t>Provided: `CustomTaskAwaiter.cs`, `Program.cs`, `CustomTask` stubs</a:t>
             </a:r>
           </a:p>
           <a:p>
             <a:pPr lvl="1"/>
             <a:r>
               <a:rPr lang="en-US" dirty="0"/>
-              <a:t>Prints the Starting Thread Id and three `CustomTask` Ids</a:t>
+              <a:t>`Program.cs` runs all five steps, as its comments describe</a:t>
             </a:r>
           </a:p>
           <a:p>
@@ -9370,14 +9151,14 @@
           <a:p>
             <a:r>
               <a:rPr lang="en-US" dirty="0"/>
-              <a:t>AI Agents: understand, interpret errors, ask questions*</a:t>
+              <a:t>AI Agents: understand, interpret errors, ask questions</a:t>
             </a:r>
           </a:p>
           <a:p>
             <a:pPr lvl="2"/>
             <a:r>
               <a:rPr lang="en-US" dirty="0"/>
-              <a:t>*Not to solve the challenge. You're smart. You got this.</a:t>
+              <a:t>Not to solve the challenge. You're smart. You got this.</a:t>
             </a:r>
           </a:p>
         </p:txBody>
@@ -10455,7 +10236,7 @@
         <p:spPr>
           <a:xfrm>
             <a:off x="274320" y="1627632"/>
-            <a:ext cx="5303520" cy="4636008"/>
+            <a:ext cx="9493624" cy="2536079"/>
           </a:xfrm>
         </p:spPr>
         <p:txBody>
@@ -10476,14 +10257,23 @@
           <a:p>
             <a:r>
               <a:rPr lang="en-US" sz="2800" dirty="0"/>
+              <a:t>Always use `ExceptionDispatchInfo` to preserve Stack Trace</a:t>
+            </a:r>
+          </a:p>
+          <a:p>
+            <a:pPr lvl="1"/>
+            <a:r>
+              <a:rPr lang="en-US" sz="2000" dirty="0"/>
               <a:t>`throw ex;` resets the stack trace</a:t>
             </a:r>
           </a:p>
           <a:p>
-            <a:r>
-              <a:rPr lang="en-US" sz="2800" dirty="0"/>
-              <a:t>`ExceptionDispatchInfo` preserves it</a:t>
-            </a:r>
+            <a:pPr lvl="1"/>
+            <a:endParaRPr lang="en-US" sz="2000" dirty="0"/>
+          </a:p>
+          <a:p>
+            <a:pPr lvl="1"/>
+            <a:endParaRPr lang="en-US" sz="2000" dirty="0"/>
           </a:p>
         </p:txBody>
       </p:sp>
@@ -10503,8 +10293,8 @@
         </p:blipFill>
         <p:spPr>
           <a:xfrm>
-            <a:off x="5577839" y="2178526"/>
-            <a:ext cx="6583680" cy="3369628"/>
+            <a:off x="6390042" y="3810892"/>
+            <a:ext cx="5771478" cy="2953931"/>
           </a:xfrm>
           <a:prstGeom prst="rect">
             <a:avLst/>
@@ -12238,6 +12028,15 @@
 </file>
 
 <file path=customXml/item2.xml><?xml version="1.0" encoding="utf-8"?>
+<?mso-contentType ?>
+<FormTemplates xmlns="http://schemas.microsoft.com/sharepoint/v3/contenttype/forms">
+  <Display>DocumentLibraryForm</Display>
+  <Edit>DocumentLibraryForm</Edit>
+  <New>DocumentLibraryForm</New>
+</FormTemplates>
+</file>
+
+<file path=customXml/item3.xml><?xml version="1.0" encoding="utf-8"?>
 <p:properties xmlns:p="http://schemas.microsoft.com/office/2006/metadata/properties" xmlns:xsi="http://www.w3.org/2001/XMLSchema-instance" xmlns:pc="http://schemas.microsoft.com/office/infopath/2007/PartnerControls">
   <documentManagement>
     <_ip_UnifiedCompliancePolicyUIAction xmlns="http://schemas.microsoft.com/sharepoint/v3" xsi:nil="true"/>
@@ -12245,15 +12044,6 @@
     <_ip_UnifiedCompliancePolicyProperties xmlns="http://schemas.microsoft.com/sharepoint/v3" xsi:nil="true"/>
   </documentManagement>
 </p:properties>
-</file>
-
-<file path=customXml/item3.xml><?xml version="1.0" encoding="utf-8"?>
-<?mso-contentType ?>
-<FormTemplates xmlns="http://schemas.microsoft.com/sharepoint/v3/contenttype/forms">
-  <Display>DocumentLibraryForm</Display>
-  <Edit>DocumentLibraryForm</Edit>
-  <New>DocumentLibraryForm</New>
-</FormTemplates>
 </file>
 
 <file path=customXml/itemProps1.xml><?xml version="1.0" encoding="utf-8"?>
@@ -12277,6 +12067,14 @@
 </file>
 
 <file path=customXml/itemProps2.xml><?xml version="1.0" encoding="utf-8"?>
+<ds:datastoreItem xmlns:ds="http://schemas.openxmlformats.org/officeDocument/2006/customXml" ds:itemID="{758FDAC0-319D-4A54-8D8E-1D42CB1F8004}">
+  <ds:schemaRefs>
+    <ds:schemaRef ds:uri="http://schemas.microsoft.com/sharepoint/v3/contenttype/forms"/>
+  </ds:schemaRefs>
+</ds:datastoreItem>
+</file>
+
+<file path=customXml/itemProps3.xml><?xml version="1.0" encoding="utf-8"?>
 <ds:datastoreItem xmlns:ds="http://schemas.openxmlformats.org/officeDocument/2006/customXml" ds:itemID="{B59C5458-A72E-4627-9FFC-D350DCB4700F}">
   <ds:schemaRefs>
     <ds:schemaRef ds:uri="http://schemas.microsoft.com/office/2006/metadata/properties"/>
@@ -12294,14 +12092,6 @@
 </ds:datastoreItem>
 </file>
 
-<file path=customXml/itemProps3.xml><?xml version="1.0" encoding="utf-8"?>
-<ds:datastoreItem xmlns:ds="http://schemas.openxmlformats.org/officeDocument/2006/customXml" ds:itemID="{758FDAC0-319D-4A54-8D8E-1D42CB1F8004}">
-  <ds:schemaRefs>
-    <ds:schemaRef ds:uri="http://schemas.microsoft.com/sharepoint/v3/contenttype/forms"/>
-  </ds:schemaRefs>
-</ds:datastoreItem>
-</file>
-
 <file path=docMetadata/LabelInfo.xml><?xml version="1.0" encoding="utf-8"?>
 <clbl:labelList xmlns:clbl="http://schemas.microsoft.com/office/2020/mipLabelMetadata">
   <clbl:label id="{f42aa342-8706-4288-bd11-ebb85995028c}" enabled="1" method="Privileged" siteId="{72f988bf-86f1-41af-91ab-2d7cd011db47}" removed="0"/>

--- a/4. Creating Custom Implementation of Task/CreatingTaskFromScratch.pptx
+++ b/4. Creating Custom Implementation of Task/CreatingTaskFromScratch.pptx
@@ -254,7 +254,7 @@
               <a:rPr lang="en-US" smtClean="0">
                 <a:latin typeface="Segoe UI" pitchFamily="34" charset="0"/>
               </a:rPr>
-              <a:t>9/14/26 5:55 AM</a:t>
+              <a:t>9/14/26 1:38 PM</a:t>
             </a:fld>
             <a:endParaRPr lang="en-US">
               <a:latin typeface="Segoe UI" pitchFamily="34" charset="0"/>
@@ -532,7 +532,7 @@
           <a:p>
             <a:fld id="{D18B56EA-E28F-4F92-9F16-7A6F2501B303}" type="datetime8">
               <a:rPr lang="en-US" smtClean="0"/>
-              <a:t>9/14/26 5:54 AM</a:t>
+              <a:t>9/14/26 1:37 PM</a:t>
             </a:fld>
             <a:endParaRPr lang="en-US"/>
           </a:p>
@@ -929,70 +929,243 @@
           <a:lstStyle/>
           <a:p>
             <a:r>
-              <a:t>Wait() blocks the calling thread until the task completes. We spent this morning telling you never to block, and the reason stands: a blocked thread is wasted, and blocking a thread that owns a SynchronizationContext deadlocks. The challenge asks for it anyway, for two reasons. The awaiter's GetResult() needs a synchronous way to observe the outcome, and Task.Wait() exists, so you should know how it is built.</a:t>
-            </a:r>
-          </a:p>
-          <a:p>
-            <a:endParaRPr/>
-          </a:p>
-          <a:p>
-            <a:r>
+              <a:rPr dirty="0"/>
+              <a:t>Wait() blocks the calling thread until the task completes. We spent this morning telling you never to block, and the reason stands: a blocked thread is wasted, and blocking a thread that owns a </a:t>
+            </a:r>
+            <a:r>
+              <a:rPr dirty="0" err="1"/>
+              <a:t>SynchronizationContext</a:t>
+            </a:r>
+            <a:r>
+              <a:rPr dirty="0"/>
+              <a:t> deadlocks. The challenge asks for it anyway, for two reasons. The </a:t>
+            </a:r>
+            <a:r>
+              <a:rPr dirty="0" err="1"/>
+              <a:t>awaiter's</a:t>
+            </a:r>
+            <a:r>
+              <a:rPr dirty="0"/>
+              <a:t> </a:t>
+            </a:r>
+            <a:r>
+              <a:rPr dirty="0" err="1"/>
+              <a:t>GetResult</a:t>
+            </a:r>
+            <a:r>
+              <a:rPr dirty="0"/>
+              <a:t>() needs a synchronous way to observe the outcome, and </a:t>
+            </a:r>
+            <a:r>
+              <a:rPr dirty="0" err="1"/>
+              <a:t>Task.Wait</a:t>
+            </a:r>
+            <a:r>
+              <a:rPr dirty="0"/>
+              <a:t>() exists, so you should know how it is built.</a:t>
+            </a:r>
+          </a:p>
+          <a:p>
+            <a:endParaRPr dirty="0"/>
+          </a:p>
+          <a:p>
+            <a:r>
+              <a:rPr dirty="0"/>
               <a:t>Bullet by bullet:</a:t>
             </a:r>
           </a:p>
           <a:p>
             <a:r>
-              <a:t>• Wait() blocks until Set() is called: ManualResetEventSlim is the primitive. Wait() parks the calling thread until another thread calls Set().</a:t>
-            </a:r>
-          </a:p>
-          <a:p>
-            <a:r>
+              <a:rPr dirty="0"/>
+              <a:t>• Wait() blocks until Set() is called: </a:t>
+            </a:r>
+            <a:r>
+              <a:rPr dirty="0" err="1"/>
+              <a:t>ManualResetEventSlim</a:t>
+            </a:r>
+            <a:r>
+              <a:rPr dirty="0"/>
+              <a:t> is the primitive. Wait() parks the calling thread until another thread calls Set().</a:t>
+            </a:r>
+          </a:p>
+          <a:p>
+            <a:r>
+              <a:rPr dirty="0"/>
               <a:t>• Once set, every current and future waiter passes: it is a gate, not a ticket. It stays open until someone calls Reset(), which you never will here.</a:t>
             </a:r>
           </a:p>
           <a:p>
             <a:r>
-              <a:t>• Register Set() as a continuation, then block: reuse the machinery you already built. Only create the event when the task is still incomplete, and register its Set() as a continuation while you hold the lock so the check and the registration are atomic. Calling ContinueWith() from inside your lock is fine: the lock statement, Monitor and the .NET 9 Lock type are all reentrant, so the same thread can enter a lock it already holds. Because the event goes through the same continuation list as everything else, two callers blocking on one task each get their own event and both wake up.</a:t>
-            </a:r>
-          </a:p>
-          <a:p>
-            <a:r>
-              <a:t>• After waking, rethrow the stored Exception: with ExceptionDispatchInfo.Throw(), so the caller sees the original stack trace.</a:t>
-            </a:r>
-          </a:p>
-          <a:p>
-            <a:endParaRPr/>
-          </a:p>
-          <a:p>
-            <a:r>
-              <a:t>The real Task does the same thing. Task.Wait() spins briefly, then registers a SetOnInvokeMres continuation, a ManualResetEventSlim subclass whose Invoke() calls Set(), and blocks on it. Search Task.cs for SpinThenBlockingWait.</a:t>
-            </a:r>
-          </a:p>
-          <a:p>
-            <a:endParaRPr/>
-          </a:p>
-          <a:p>
-            <a:r>
-              <a:t>Why this matters for the challenge: requirement 8, Wait() with a blocking wait primitive, and it is also how the provided CustomTaskAwaiter.GetResult() observes the outcome.</a:t>
-            </a:r>
-          </a:p>
-          <a:p>
-            <a:endParaRPr/>
-          </a:p>
-          <a:p>
-            <a:r>
+              <a:rPr dirty="0"/>
+              <a:t>• Register Set() as a continuation, then block: reuse the machinery you already built. Only create the event when the task is still incomplete, and register its Set() as a continuation while you hold the lock so the check and the registration are atomic. Calling </a:t>
+            </a:r>
+            <a:r>
+              <a:rPr dirty="0" err="1"/>
+              <a:t>ContinueWith</a:t>
+            </a:r>
+            <a:r>
+              <a:rPr dirty="0"/>
+              <a:t>() from inside your lock is fine: the lock statement, Monitor and the .NET 9 Lock type are all reentrant, so the same thread can enter a lock it already holds. Because the event goes through the same continuation list as everything else, two callers blocking on one task each get their own event and both wake up.</a:t>
+            </a:r>
+          </a:p>
+          <a:p>
+            <a:r>
+              <a:rPr dirty="0"/>
+              <a:t>• After waking, rethrow the stored Exception: with </a:t>
+            </a:r>
+            <a:r>
+              <a:rPr dirty="0" err="1"/>
+              <a:t>ExceptionDispatchInfo.Throw</a:t>
+            </a:r>
+            <a:r>
+              <a:rPr dirty="0"/>
+              <a:t>(), so the caller sees the original stack trace.</a:t>
+            </a:r>
+          </a:p>
+          <a:p>
+            <a:endParaRPr dirty="0"/>
+          </a:p>
+          <a:p>
+            <a:r>
+              <a:rPr dirty="0"/>
+              <a:t>The real Task does the same thing. </a:t>
+            </a:r>
+            <a:r>
+              <a:rPr dirty="0" err="1"/>
+              <a:t>Task.Wait</a:t>
+            </a:r>
+            <a:r>
+              <a:rPr dirty="0"/>
+              <a:t>() spins briefly, then registers a </a:t>
+            </a:r>
+            <a:r>
+              <a:rPr dirty="0" err="1"/>
+              <a:t>SetOnInvokeMres</a:t>
+            </a:r>
+            <a:r>
+              <a:rPr dirty="0"/>
+              <a:t> continuation, a </a:t>
+            </a:r>
+            <a:r>
+              <a:rPr dirty="0" err="1"/>
+              <a:t>ManualResetEventSlim</a:t>
+            </a:r>
+            <a:r>
+              <a:rPr dirty="0"/>
+              <a:t> subclass whose Invoke() calls Set(), and blocks on it. Search </a:t>
+            </a:r>
+            <a:r>
+              <a:rPr dirty="0" err="1"/>
+              <a:t>Task.cs</a:t>
+            </a:r>
+            <a:r>
+              <a:rPr dirty="0"/>
+              <a:t> for </a:t>
+            </a:r>
+            <a:r>
+              <a:rPr dirty="0" err="1"/>
+              <a:t>SpinThenBlockingWait</a:t>
+            </a:r>
+            <a:r>
+              <a:rPr dirty="0"/>
+              <a:t>.</a:t>
+            </a:r>
+          </a:p>
+          <a:p>
+            <a:endParaRPr dirty="0"/>
+          </a:p>
+          <a:p>
+            <a:r>
+              <a:rPr dirty="0"/>
+              <a:t>Why this matters for the challenge: requirement 8, Wait() with a blocking wait primitive, and it is also how the provided </a:t>
+            </a:r>
+            <a:r>
+              <a:rPr dirty="0" err="1"/>
+              <a:t>CustomTaskAwaiter.GetResult</a:t>
+            </a:r>
+            <a:r>
+              <a:rPr dirty="0"/>
+              <a:t>() observes the outcome.</a:t>
+            </a:r>
+          </a:p>
+          <a:p>
+            <a:endParaRPr dirty="0"/>
+          </a:p>
+          <a:p>
+            <a:r>
+              <a:rPr dirty="0"/>
               <a:t>References:</a:t>
             </a:r>
           </a:p>
           <a:p>
             <a:r>
-              <a:t>https://learn.microsoft.com/dotnet/api/system.threading.manualreseteventslim</a:t>
-            </a:r>
-          </a:p>
-          <a:p>
-            <a:r>
-              <a:t>https://github.com/dotnet/runtime/blob/main/src/libraries/System.Private.CoreLib/src/System/Threading/Tasks/Task.cs</a:t>
-            </a:r>
+              <a:rPr dirty="0"/>
+              <a:t>https://</a:t>
+            </a:r>
+            <a:r>
+              <a:rPr dirty="0" err="1"/>
+              <a:t>learn.microsoft.com</a:t>
+            </a:r>
+            <a:r>
+              <a:rPr dirty="0"/>
+              <a:t>/dotnet/</a:t>
+            </a:r>
+            <a:r>
+              <a:rPr dirty="0" err="1"/>
+              <a:t>api</a:t>
+            </a:r>
+            <a:r>
+              <a:rPr dirty="0"/>
+              <a:t>/</a:t>
+            </a:r>
+            <a:r>
+              <a:rPr dirty="0" err="1"/>
+              <a:t>system.threading.manualreseteventslim</a:t>
+            </a:r>
+            <a:endParaRPr dirty="0"/>
+          </a:p>
+          <a:p>
+            <a:r>
+              <a:rPr dirty="0"/>
+              <a:t>https://</a:t>
+            </a:r>
+            <a:r>
+              <a:rPr dirty="0" err="1"/>
+              <a:t>github.com</a:t>
+            </a:r>
+            <a:r>
+              <a:rPr dirty="0"/>
+              <a:t>/dotnet/runtime/blob/main/</a:t>
+            </a:r>
+            <a:r>
+              <a:rPr dirty="0" err="1"/>
+              <a:t>src</a:t>
+            </a:r>
+            <a:r>
+              <a:rPr dirty="0"/>
+              <a:t>/libraries/</a:t>
+            </a:r>
+            <a:r>
+              <a:rPr dirty="0" err="1"/>
+              <a:t>System.Private.CoreLib</a:t>
+            </a:r>
+            <a:r>
+              <a:rPr dirty="0"/>
+              <a:t>/</a:t>
+            </a:r>
+            <a:r>
+              <a:rPr dirty="0" err="1"/>
+              <a:t>src</a:t>
+            </a:r>
+            <a:r>
+              <a:rPr dirty="0"/>
+              <a:t>/System/Threading/Tasks/</a:t>
+            </a:r>
+            <a:r>
+              <a:rPr dirty="0" err="1"/>
+              <a:t>Task.cs</a:t>
+            </a:r>
+            <a:endParaRPr dirty="0"/>
           </a:p>
         </p:txBody>
       </p:sp>
@@ -1756,57 +1929,224 @@
           <a:lstStyle/>
           <a:p>
             <a:r>
-              <a:t>ThreadPool.QueueUserWorkItem() is the primitive behind Task.Run(). You hand it a delegate, and one of the pool's worker threads picks it up as soon as one is free. The caller does not wait.</a:t>
-            </a:r>
-          </a:p>
-          <a:p>
-            <a:endParaRPr/>
-          </a:p>
-          <a:p>
-            <a:r>
+              <a:rPr dirty="0" err="1"/>
+              <a:t>ThreadPool.QueueUserWorkItem</a:t>
+            </a:r>
+            <a:r>
+              <a:rPr dirty="0"/>
+              <a:t>() is the primitive behind </a:t>
+            </a:r>
+            <a:r>
+              <a:rPr dirty="0" err="1"/>
+              <a:t>Task.Run</a:t>
+            </a:r>
+            <a:r>
+              <a:rPr dirty="0"/>
+              <a:t>(). You hand it a delegate, and one of the pool's worker threads picks it up as soon as one is free. The caller does not wait.</a:t>
+            </a:r>
+          </a:p>
+          <a:p>
+            <a:endParaRPr dirty="0"/>
+          </a:p>
+          <a:p>
+            <a:r>
+              <a:rPr dirty="0"/>
               <a:t>Bullet by bullet:</a:t>
             </a:r>
           </a:p>
           <a:p>
             <a:r>
-              <a:t>• Hands a delegate to a pool thread, returns immediately: run this snippet and the two thread Ids differ. Remember Thread 1 and Thread 2 from this morning's GetLibraries() animation? Same idea, same footnote: it can be any thread other than Thread 1, and it can be a different number every run.</a:t>
-            </a:r>
-          </a:p>
-          <a:p>
-            <a:r>
-              <a:t>• The primitive underneath Task.Run(): Task.Run() creates a Task, queues a work item that invokes your delegate, and completes the Task when the delegate returns. That is the shape of your Run(Action) too: create, queue, complete. Wrap the delegate in try/catch so an exception completes the task instead of crashing the pool thread; the Exceptions slide covers what to do with it.</a:t>
-            </a:r>
-          </a:p>
-          <a:p>
-            <a:r>
-              <a:t>• Captures the caller's ExecutionContext: QueueUserWorkItem() snapshots the calling thread's ExecutionContext and restores it on the pool thread before your delegate runs, exactly the Capture() and Run() pair from the .NET Internals deck. UnsafeQueueUserWorkItem() skips that capture. For Run() itself the plain version is what you want, because the caller's ambient state (culture, principal, AsyncLocal values) should flow into the work, just like the real Task.Run(). Hold on to the Unsafe variant; it comes back on the ExecutionContext slide.</a:t>
-            </a:r>
-          </a:p>
-          <a:p>
-            <a:endParaRPr/>
-          </a:p>
-          <a:p>
-            <a:r>
-              <a:t>Why this matters for the challenge: requirement 3 is Run(Action) on the Thread Pool, and acceptance check 2 runs Step 1 of Program.cs, where the Run() action prints a thread pool Thread Id instead of the main thread's: the visible proof that the work left the starting thread.</a:t>
-            </a:r>
-          </a:p>
-          <a:p>
-            <a:endParaRPr/>
-          </a:p>
-          <a:p>
-            <a:r>
+              <a:rPr dirty="0"/>
+              <a:t>• Hands a delegate to a pool thread, returns immediately: run this snippet and the two thread Ids differ. Remember Thread 1 and Thread 2 from this morning's </a:t>
+            </a:r>
+            <a:r>
+              <a:rPr dirty="0" err="1"/>
+              <a:t>GetLibraries</a:t>
+            </a:r>
+            <a:r>
+              <a:rPr dirty="0"/>
+              <a:t>() animation? Same idea, same footnote: it can be any thread other than Thread 1, and it can be a different number every run.</a:t>
+            </a:r>
+          </a:p>
+          <a:p>
+            <a:r>
+              <a:rPr dirty="0"/>
+              <a:t>• The primitive underneath </a:t>
+            </a:r>
+            <a:r>
+              <a:rPr dirty="0" err="1"/>
+              <a:t>Task.Run</a:t>
+            </a:r>
+            <a:r>
+              <a:rPr dirty="0"/>
+              <a:t>(): </a:t>
+            </a:r>
+            <a:r>
+              <a:rPr dirty="0" err="1"/>
+              <a:t>Task.Run</a:t>
+            </a:r>
+            <a:r>
+              <a:rPr dirty="0"/>
+              <a:t>() creates a Task, queues a work item that invokes your delegate, and completes the Task when the delegate returns. That is the shape of your Run(Action) too: create, queue, complete. Wrap the delegate in try/catch so an exception completes the task instead of crashing the pool thread; the Exceptions slide covers what to do with it.</a:t>
+            </a:r>
+          </a:p>
+          <a:p>
+            <a:r>
+              <a:rPr dirty="0"/>
+              <a:t>• Captures the caller's </a:t>
+            </a:r>
+            <a:r>
+              <a:rPr dirty="0" err="1"/>
+              <a:t>ExecutionContext</a:t>
+            </a:r>
+            <a:r>
+              <a:rPr dirty="0"/>
+              <a:t>: </a:t>
+            </a:r>
+            <a:r>
+              <a:rPr dirty="0" err="1"/>
+              <a:t>QueueUserWorkItem</a:t>
+            </a:r>
+            <a:r>
+              <a:rPr dirty="0"/>
+              <a:t>() snapshots the calling thread's </a:t>
+            </a:r>
+            <a:r>
+              <a:rPr dirty="0" err="1"/>
+              <a:t>ExecutionContext</a:t>
+            </a:r>
+            <a:r>
+              <a:rPr dirty="0"/>
+              <a:t> and restores it on the pool thread before your delegate runs, exactly the Capture() and Run() pair from the .NET Internals deck. </a:t>
+            </a:r>
+            <a:r>
+              <a:rPr dirty="0" err="1"/>
+              <a:t>UnsafeQueueUserWorkItem</a:t>
+            </a:r>
+            <a:r>
+              <a:rPr dirty="0"/>
+              <a:t>() skips that capture. For Run() itself the plain version is what you want, because the caller's ambient state (culture, principal, </a:t>
+            </a:r>
+            <a:r>
+              <a:rPr dirty="0" err="1"/>
+              <a:t>AsyncLocal</a:t>
+            </a:r>
+            <a:r>
+              <a:rPr dirty="0"/>
+              <a:t> values) should flow into the work, just like the real </a:t>
+            </a:r>
+            <a:r>
+              <a:rPr dirty="0" err="1"/>
+              <a:t>Task.Run</a:t>
+            </a:r>
+            <a:r>
+              <a:rPr dirty="0"/>
+              <a:t>(). Hold on to the Unsafe variant; it comes back on the </a:t>
+            </a:r>
+            <a:r>
+              <a:rPr dirty="0" err="1"/>
+              <a:t>ExecutionContext</a:t>
+            </a:r>
+            <a:r>
+              <a:rPr dirty="0"/>
+              <a:t> slide.</a:t>
+            </a:r>
+          </a:p>
+          <a:p>
+            <a:endParaRPr dirty="0"/>
+          </a:p>
+          <a:p>
+            <a:r>
+              <a:rPr dirty="0"/>
+              <a:t>Why this matters for the challenge: requirement 3 is Run(Action) on the Thread Pool, and acceptance check 2 runs Step 1 of </a:t>
+            </a:r>
+            <a:r>
+              <a:rPr dirty="0" err="1"/>
+              <a:t>Program.cs</a:t>
+            </a:r>
+            <a:r>
+              <a:rPr dirty="0"/>
+              <a:t>, where the Run() action prints a thread pool Thread Id instead of the main thread's: the visible proof that the work left the starting thread.</a:t>
+            </a:r>
+          </a:p>
+          <a:p>
+            <a:endParaRPr dirty="0"/>
+          </a:p>
+          <a:p>
+            <a:r>
+              <a:rPr dirty="0"/>
               <a:t>References:</a:t>
             </a:r>
           </a:p>
           <a:p>
             <a:r>
-              <a:t>https://learn.microsoft.com/dotnet/api/system.threading.threadpool.queueuserworkitem</a:t>
-            </a:r>
-          </a:p>
-          <a:p>
-            <a:r>
-              <a:t>https://github.com/dotnet/runtime/blob/main/src/libraries/System.Private.CoreLib/src/System/Threading/ThreadPoolWorkQueue.cs</a:t>
-            </a:r>
+              <a:rPr dirty="0"/>
+              <a:t>https://</a:t>
+            </a:r>
+            <a:r>
+              <a:rPr dirty="0" err="1"/>
+              <a:t>learn.microsoft.com</a:t>
+            </a:r>
+            <a:r>
+              <a:rPr dirty="0"/>
+              <a:t>/dotnet/</a:t>
+            </a:r>
+            <a:r>
+              <a:rPr dirty="0" err="1"/>
+              <a:t>api</a:t>
+            </a:r>
+            <a:r>
+              <a:rPr dirty="0"/>
+              <a:t>/</a:t>
+            </a:r>
+            <a:r>
+              <a:rPr dirty="0" err="1"/>
+              <a:t>system.threading.threadpool.queueuserworkitem</a:t>
+            </a:r>
+            <a:endParaRPr dirty="0"/>
+          </a:p>
+          <a:p>
+            <a:r>
+              <a:rPr dirty="0"/>
+              <a:t>https://</a:t>
+            </a:r>
+            <a:r>
+              <a:rPr dirty="0" err="1"/>
+              <a:t>github.com</a:t>
+            </a:r>
+            <a:r>
+              <a:rPr dirty="0"/>
+              <a:t>/dotnet/runtime/blob/main/</a:t>
+            </a:r>
+            <a:r>
+              <a:rPr dirty="0" err="1"/>
+              <a:t>src</a:t>
+            </a:r>
+            <a:r>
+              <a:rPr dirty="0"/>
+              <a:t>/libraries/</a:t>
+            </a:r>
+            <a:r>
+              <a:rPr dirty="0" err="1"/>
+              <a:t>System.Private.CoreLib</a:t>
+            </a:r>
+            <a:r>
+              <a:rPr dirty="0"/>
+              <a:t>/</a:t>
+            </a:r>
+            <a:r>
+              <a:rPr dirty="0" err="1"/>
+              <a:t>src</a:t>
+            </a:r>
+            <a:r>
+              <a:rPr dirty="0"/>
+              <a:t>/System/Threading/</a:t>
+            </a:r>
+            <a:r>
+              <a:rPr dirty="0" err="1"/>
+              <a:t>ThreadPoolWorkQueue.cs</a:t>
+            </a:r>
+            <a:endParaRPr dirty="0"/>
           </a:p>
         </p:txBody>
       </p:sp>
@@ -9500,8 +9840,8 @@
         </p:nvSpPr>
         <p:spPr>
           <a:xfrm>
-            <a:off x="274320" y="1627632"/>
-            <a:ext cx="5303520" cy="4636008"/>
+            <a:off x="274319" y="1627632"/>
+            <a:ext cx="9880899" cy="1994392"/>
           </a:xfrm>
         </p:spPr>
         <p:txBody>
@@ -9510,7 +9850,7 @@
           <a:p>
             <a:r>
               <a:rPr lang="en-US" sz="2800" dirty="0"/>
-              <a:t>Hands a delegate to a pool thread, returns immediately*</a:t>
+              <a:t>Hands a delegate to a pool thread, returns immediately</a:t>
             </a:r>
           </a:p>
           <a:p>
@@ -9522,14 +9862,25 @@
           <a:p>
             <a:r>
               <a:rPr lang="en-US" sz="2800" dirty="0"/>
-              <a:t>Captures the caller's `ExecutionContext`; `Unsafe…` does not</a:t>
-            </a:r>
-          </a:p>
-          <a:p>
-            <a:pPr lvl="2"/>
-            <a:r>
-              <a:rPr lang="en-US" sz="2400" dirty="0"/>
-              <a:t>*Can be any thread other than Thread 1, e.g. Thread 32</a:t>
+              <a:t>Captures the caller's `</a:t>
+            </a:r>
+            <a:r>
+              <a:rPr lang="en-US" sz="2800" dirty="0" err="1"/>
+              <a:t>ExecutionContext</a:t>
+            </a:r>
+            <a:r>
+              <a:rPr lang="en-US" sz="2800" dirty="0"/>
+              <a:t>`</a:t>
+            </a:r>
+          </a:p>
+          <a:p>
+            <a:r>
+              <a:rPr lang="en-US" sz="2800" dirty="0" err="1"/>
+              <a:t>ThreadPool.UnsafeQueueUserWorkItem</a:t>
+            </a:r>
+            <a:r>
+              <a:rPr lang="en-US" sz="2800" dirty="0"/>
+              <a:t> does not</a:t>
             </a:r>
           </a:p>
         </p:txBody>
@@ -9550,8 +9901,8 @@
         </p:blipFill>
         <p:spPr>
           <a:xfrm>
-            <a:off x="5577839" y="2274118"/>
-            <a:ext cx="6583680" cy="3178443"/>
+            <a:off x="6078070" y="4018863"/>
+            <a:ext cx="6084085" cy="2937251"/>
           </a:xfrm>
           <a:prstGeom prst="rect">
             <a:avLst/>
@@ -9650,7 +10001,7 @@
         <p:spPr>
           <a:xfrm>
             <a:off x="274320" y="1627632"/>
-            <a:ext cx="5303520" cy="4636008"/>
+            <a:ext cx="10623176" cy="4636008"/>
           </a:xfrm>
         </p:spPr>
         <p:txBody>
@@ -9698,7 +10049,7 @@
         </p:blipFill>
         <p:spPr>
           <a:xfrm>
-            <a:off x="5577839" y="2491458"/>
+            <a:off x="5577840" y="4094347"/>
             <a:ext cx="6583680" cy="2743764"/>
           </a:xfrm>
           <a:prstGeom prst="rect">
@@ -9798,7 +10149,7 @@
         <p:spPr>
           <a:xfrm>
             <a:off x="274320" y="1627632"/>
-            <a:ext cx="5303520" cy="4636008"/>
+            <a:ext cx="9299986" cy="1858970"/>
           </a:xfrm>
         </p:spPr>
         <p:txBody>
@@ -9819,13 +10170,14 @@
           <a:p>
             <a:r>
               <a:rPr lang="en-US" sz="2800" dirty="0"/>
-              <a:t>Keep a list; drain it when the `Task` completes</a:t>
-            </a:r>
-          </a:p>
-          <a:p>
-            <a:r>
-              <a:rPr lang="en-US" sz="2800" dirty="0"/>
-              <a:t>Check-then-register must be atomic: `lock`</a:t>
+              <a:t>Keep a list of Continuations</a:t>
+            </a:r>
+          </a:p>
+          <a:p>
+            <a:pPr lvl="1"/>
+            <a:r>
+              <a:rPr lang="en-US" sz="2000" dirty="0"/>
+              <a:t>Execute the continuations it when the `Task` completes</a:t>
             </a:r>
           </a:p>
         </p:txBody>
@@ -9846,8 +10198,8 @@
         </p:blipFill>
         <p:spPr>
           <a:xfrm>
-            <a:off x="5577839" y="2436077"/>
-            <a:ext cx="6583680" cy="2854525"/>
+            <a:off x="6099585" y="4070667"/>
+            <a:ext cx="6062569" cy="2628584"/>
           </a:xfrm>
           <a:prstGeom prst="rect">
             <a:avLst/>
@@ -9946,7 +10298,7 @@
         <p:spPr>
           <a:xfrm>
             <a:off x="274320" y="1627632"/>
-            <a:ext cx="5303520" cy="4636008"/>
+            <a:ext cx="10139082" cy="2332946"/>
           </a:xfrm>
         </p:spPr>
         <p:txBody>
@@ -9955,7 +10307,22 @@
           <a:p>
             <a:r>
               <a:rPr lang="en-US" sz="2800" dirty="0"/>
-              <a:t>`SetResult()` or `SetException()`, never both</a:t>
+              <a:t>`SetResult()` or `</a:t>
+            </a:r>
+            <a:r>
+              <a:rPr lang="en-US" sz="2800" dirty="0" err="1"/>
+              <a:t>SetException</a:t>
+            </a:r>
+            <a:r>
+              <a:rPr lang="en-US" sz="2800" dirty="0"/>
+              <a:t>()`</a:t>
+            </a:r>
+          </a:p>
+          <a:p>
+            <a:pPr lvl="1"/>
+            <a:r>
+              <a:rPr lang="en-US" sz="2000" dirty="0"/>
+              <a:t>Never both</a:t>
             </a:r>
           </a:p>
           <a:p>
@@ -9994,8 +10361,8 @@
         </p:blipFill>
         <p:spPr>
           <a:xfrm>
-            <a:off x="5577839" y="2413088"/>
-            <a:ext cx="6583680" cy="2900502"/>
+            <a:off x="6133907" y="4183083"/>
+            <a:ext cx="6030296" cy="2656703"/>
           </a:xfrm>
           <a:prstGeom prst="rect">
             <a:avLst/>
@@ -10093,8 +10460,8 @@
         </p:nvSpPr>
         <p:spPr>
           <a:xfrm>
-            <a:off x="274320" y="1627632"/>
-            <a:ext cx="5303520" cy="2683812"/>
+            <a:off x="274319" y="1627632"/>
+            <a:ext cx="9568927" cy="1520416"/>
           </a:xfrm>
         </p:spPr>
         <p:txBody>
@@ -10103,19 +10470,27 @@
           <a:p>
             <a:r>
               <a:rPr lang="en-US" sz="2800" dirty="0"/>
-              <a:t>Capture on register: that caller's state is what matters</a:t>
+              <a:t>Capture when Task is registered</a:t>
             </a:r>
           </a:p>
           <a:p>
             <a:r>
               <a:rPr lang="en-US" sz="2800" dirty="0"/>
-              <a:t>Null context: still queue it, just skip `Run()`</a:t>
+              <a:t>When Null, Run Continuation</a:t>
             </a:r>
           </a:p>
           <a:p>
             <a:r>
               <a:rPr lang="en-US" sz="2800" dirty="0"/>
-              <a:t>Dispatch with `UnsafeQueueUserWorkItem()`</a:t>
+              <a:t>Dispatch with `</a:t>
+            </a:r>
+            <a:r>
+              <a:rPr lang="en-US" sz="2800" dirty="0" err="1"/>
+              <a:t>UnsafeQueueUserWorkItem</a:t>
+            </a:r>
+            <a:r>
+              <a:rPr lang="en-US" sz="2800" dirty="0"/>
+              <a:t>()`</a:t>
             </a:r>
           </a:p>
         </p:txBody>
@@ -10136,7 +10511,7 @@
         </p:blipFill>
         <p:spPr>
           <a:xfrm>
-            <a:off x="5577839" y="2379364"/>
+            <a:off x="5578475" y="3882918"/>
             <a:ext cx="6583680" cy="2967950"/>
           </a:xfrm>
           <a:prstGeom prst="rect">
@@ -10236,7 +10611,7 @@
         <p:spPr>
           <a:xfrm>
             <a:off x="274320" y="1627632"/>
-            <a:ext cx="9493624" cy="2536079"/>
+            <a:ext cx="9493624" cy="2874633"/>
           </a:xfrm>
         </p:spPr>
         <p:txBody>
@@ -10245,7 +10620,14 @@
           <a:p>
             <a:r>
               <a:rPr lang="en-US" sz="2800" dirty="0"/>
-              <a:t>Catch on the pool thread, store on the `Task`</a:t>
+              <a:t>Catch on the Thread Pool thread</a:t>
+            </a:r>
+          </a:p>
+          <a:p>
+            <a:pPr lvl="1"/>
+            <a:r>
+              <a:rPr lang="en-US" sz="2000" dirty="0"/>
+              <a:t>Store Exception in the `Task`</a:t>
             </a:r>
           </a:p>
           <a:p>
@@ -11782,6 +12164,25 @@
 </file>
 
 <file path=customXml/item1.xml><?xml version="1.0" encoding="utf-8"?>
+<p:properties xmlns:p="http://schemas.microsoft.com/office/2006/metadata/properties" xmlns:xsi="http://www.w3.org/2001/XMLSchema-instance" xmlns:pc="http://schemas.microsoft.com/office/infopath/2007/PartnerControls">
+  <documentManagement>
+    <_ip_UnifiedCompliancePolicyUIAction xmlns="http://schemas.microsoft.com/sharepoint/v3" xsi:nil="true"/>
+    <MediaServiceKeyPoints xmlns="16dc66bd-df5a-4495-a5c9-5e296f49988a" xsi:nil="true"/>
+    <_ip_UnifiedCompliancePolicyProperties xmlns="http://schemas.microsoft.com/sharepoint/v3" xsi:nil="true"/>
+  </documentManagement>
+</p:properties>
+</file>
+
+<file path=customXml/item2.xml><?xml version="1.0" encoding="utf-8"?>
+<?mso-contentType ?>
+<FormTemplates xmlns="http://schemas.microsoft.com/sharepoint/v3/contenttype/forms">
+  <Display>DocumentLibraryForm</Display>
+  <Edit>DocumentLibraryForm</Edit>
+  <New>DocumentLibraryForm</New>
+</FormTemplates>
+</file>
+
+<file path=customXml/item3.xml><?xml version="1.0" encoding="utf-8"?>
 <ct:contentTypeSchema xmlns:ct="http://schemas.microsoft.com/office/2006/metadata/contentType" xmlns:ma="http://schemas.microsoft.com/office/2006/metadata/properties/metaAttributes" ct:_="" ma:_="" ma:contentTypeName="Document" ma:contentTypeID="0x010100A33D2391BFF58241AEB203BD95DC1F89" ma:contentTypeVersion="16" ma:contentTypeDescription="Create a new document." ma:contentTypeScope="" ma:versionID="bd4b5e6fa70efd11586bd069caa6259f">
   <xsd:schema xmlns:xsd="http://www.w3.org/2001/XMLSchema" xmlns:xs="http://www.w3.org/2001/XMLSchema" xmlns:p="http://schemas.microsoft.com/office/2006/metadata/properties" xmlns:ns1="http://schemas.microsoft.com/sharepoint/v3" xmlns:ns2="16dc66bd-df5a-4495-a5c9-5e296f49988a" xmlns:ns3="12239fb0-26c0-4a37-b790-6c81fba9d0fc" targetNamespace="http://schemas.microsoft.com/office/2006/metadata/properties" ma:root="true" ma:fieldsID="1236f19879e555dfdef409a5be7c6d72" ns1:_="" ns2:_="" ns3:_="">
     <xsd:import namespace="http://schemas.microsoft.com/sharepoint/v3"/>
@@ -12027,26 +12428,33 @@
 </ct:contentTypeSchema>
 </file>
 
-<file path=customXml/item2.xml><?xml version="1.0" encoding="utf-8"?>
-<?mso-contentType ?>
-<FormTemplates xmlns="http://schemas.microsoft.com/sharepoint/v3/contenttype/forms">
-  <Display>DocumentLibraryForm</Display>
-  <Edit>DocumentLibraryForm</Edit>
-  <New>DocumentLibraryForm</New>
-</FormTemplates>
+<file path=customXml/itemProps1.xml><?xml version="1.0" encoding="utf-8"?>
+<ds:datastoreItem xmlns:ds="http://schemas.openxmlformats.org/officeDocument/2006/customXml" ds:itemID="{B59C5458-A72E-4627-9FFC-D350DCB4700F}">
+  <ds:schemaRefs>
+    <ds:schemaRef ds:uri="http://schemas.microsoft.com/office/2006/metadata/properties"/>
+    <ds:schemaRef ds:uri="http://schemas.openxmlformats.org/package/2006/metadata/core-properties"/>
+    <ds:schemaRef ds:uri="http://purl.org/dc/dcmitype/"/>
+    <ds:schemaRef ds:uri="http://schemas.microsoft.com/office/infopath/2007/PartnerControls"/>
+    <ds:schemaRef ds:uri="http://schemas.microsoft.com/sharepoint/v3"/>
+    <ds:schemaRef ds:uri="http://purl.org/dc/elements/1.1/"/>
+    <ds:schemaRef ds:uri="http://schemas.microsoft.com/office/2006/documentManagement/types"/>
+    <ds:schemaRef ds:uri="12239fb0-26c0-4a37-b790-6c81fba9d0fc"/>
+    <ds:schemaRef ds:uri="16dc66bd-df5a-4495-a5c9-5e296f49988a"/>
+    <ds:schemaRef ds:uri="http://www.w3.org/XML/1998/namespace"/>
+    <ds:schemaRef ds:uri="http://purl.org/dc/terms/"/>
+  </ds:schemaRefs>
+</ds:datastoreItem>
 </file>
 
-<file path=customXml/item3.xml><?xml version="1.0" encoding="utf-8"?>
-<p:properties xmlns:p="http://schemas.microsoft.com/office/2006/metadata/properties" xmlns:xsi="http://www.w3.org/2001/XMLSchema-instance" xmlns:pc="http://schemas.microsoft.com/office/infopath/2007/PartnerControls">
-  <documentManagement>
-    <_ip_UnifiedCompliancePolicyUIAction xmlns="http://schemas.microsoft.com/sharepoint/v3" xsi:nil="true"/>
-    <MediaServiceKeyPoints xmlns="16dc66bd-df5a-4495-a5c9-5e296f49988a" xsi:nil="true"/>
-    <_ip_UnifiedCompliancePolicyProperties xmlns="http://schemas.microsoft.com/sharepoint/v3" xsi:nil="true"/>
-  </documentManagement>
-</p:properties>
+<file path=customXml/itemProps2.xml><?xml version="1.0" encoding="utf-8"?>
+<ds:datastoreItem xmlns:ds="http://schemas.openxmlformats.org/officeDocument/2006/customXml" ds:itemID="{758FDAC0-319D-4A54-8D8E-1D42CB1F8004}">
+  <ds:schemaRefs>
+    <ds:schemaRef ds:uri="http://schemas.microsoft.com/sharepoint/v3/contenttype/forms"/>
+  </ds:schemaRefs>
+</ds:datastoreItem>
 </file>
 
-<file path=customXml/itemProps1.xml><?xml version="1.0" encoding="utf-8"?>
+<file path=customXml/itemProps3.xml><?xml version="1.0" encoding="utf-8"?>
 <ds:datastoreItem xmlns:ds="http://schemas.openxmlformats.org/officeDocument/2006/customXml" ds:itemID="{F517AA3B-FC88-46DF-B5BA-DC6634CFCC94}">
   <ds:schemaRefs>
     <ds:schemaRef ds:uri="12239fb0-26c0-4a37-b790-6c81fba9d0fc"/>
@@ -12066,32 +12474,6 @@
 </ds:datastoreItem>
 </file>
 
-<file path=customXml/itemProps2.xml><?xml version="1.0" encoding="utf-8"?>
-<ds:datastoreItem xmlns:ds="http://schemas.openxmlformats.org/officeDocument/2006/customXml" ds:itemID="{758FDAC0-319D-4A54-8D8E-1D42CB1F8004}">
-  <ds:schemaRefs>
-    <ds:schemaRef ds:uri="http://schemas.microsoft.com/sharepoint/v3/contenttype/forms"/>
-  </ds:schemaRefs>
-</ds:datastoreItem>
-</file>
-
-<file path=customXml/itemProps3.xml><?xml version="1.0" encoding="utf-8"?>
-<ds:datastoreItem xmlns:ds="http://schemas.openxmlformats.org/officeDocument/2006/customXml" ds:itemID="{B59C5458-A72E-4627-9FFC-D350DCB4700F}">
-  <ds:schemaRefs>
-    <ds:schemaRef ds:uri="http://schemas.microsoft.com/office/2006/metadata/properties"/>
-    <ds:schemaRef ds:uri="http://schemas.openxmlformats.org/package/2006/metadata/core-properties"/>
-    <ds:schemaRef ds:uri="http://purl.org/dc/dcmitype/"/>
-    <ds:schemaRef ds:uri="http://schemas.microsoft.com/office/infopath/2007/PartnerControls"/>
-    <ds:schemaRef ds:uri="http://schemas.microsoft.com/sharepoint/v3"/>
-    <ds:schemaRef ds:uri="http://purl.org/dc/elements/1.1/"/>
-    <ds:schemaRef ds:uri="http://schemas.microsoft.com/office/2006/documentManagement/types"/>
-    <ds:schemaRef ds:uri="12239fb0-26c0-4a37-b790-6c81fba9d0fc"/>
-    <ds:schemaRef ds:uri="16dc66bd-df5a-4495-a5c9-5e296f49988a"/>
-    <ds:schemaRef ds:uri="http://www.w3.org/XML/1998/namespace"/>
-    <ds:schemaRef ds:uri="http://purl.org/dc/terms/"/>
-  </ds:schemaRefs>
-</ds:datastoreItem>
-</file>
-
 <file path=docMetadata/LabelInfo.xml><?xml version="1.0" encoding="utf-8"?>
 <clbl:labelList xmlns:clbl="http://schemas.microsoft.com/office/2020/mipLabelMetadata">
   <clbl:label id="{f42aa342-8706-4288-bd11-ebb85995028c}" enabled="1" method="Privileged" siteId="{72f988bf-86f1-41af-91ab-2d7cd011db47}" removed="0"/>

--- a/4. Creating Custom Implementation of Task/CreatingTaskFromScratch.pptx
+++ b/4. Creating Custom Implementation of Task/CreatingTaskFromScratch.pptx
@@ -838,7 +838,7 @@
           </a:p>
           <a:p>
             <a:r>
-              <a:t>Two files are already written for you in the starter project. CustomTaskAwaiter.cs is complete: it is the bridge between await and your class, and we read it together near the end of this deck. Program.cs is also complete: it calls every public member of CustomTask, and the starter still compiles because CustomTask.cs declares each of those members as a stub that throws NotImplementedException. Run it, and each exception message is a hint about what that member needs to do. The stubs are the challenge's to-do list.</a:t>
+              <a:t>Almost everything is already written for you in the starter project. CustomTaskAwaiter.cs is complete: it is the bridge between await and your class, and the duck typing slide near the end of this deck explains why it works. The CoffeeShop app around it is also complete: its Steps folder calls every public member of CustomTask from six real coffee shop features, and the starter still compiles because CustomTask.cs declares each of those members as a stub that throws NotImplementedException. Run it, and the Home page stops at the first stub it hits; each stub's exception message, in CustomTask.cs and in the terminal, is a hint about what that member needs to do. The stubs are the challenge's to-do list.</a:t>
             </a:r>
           </a:p>
           <a:p>
@@ -1247,7 +1247,7 @@
           </a:p>
           <a:p>
             <a:r>
-              <a:t>• Callback runs on a Thread Pool thread: System.Threading.Timer, not the Windows Forms or System.Timers one. Its callback is queued to the pool when the due time elapses, so the thread Id printed after a Delay() is another pool thread.</a:t>
+              <a:t>• Callback runs on a Thread Pool thread: System.Threading.Timer, not the Windows Forms or System.Timers one. Its callback is queued to the pool when the due time elapses, so whatever runs after a Delay() runs on a pool thread, which Step 2 checks.</a:t>
             </a:r>
           </a:p>
           <a:p>
@@ -1278,7 +1278,7 @@
           </a:p>
           <a:p>
             <a:r>
-              <a:t>Why this matters for the challenge: requirement 9 says it directly: use Timer, keep it alive until it fires, dispose it from the callback. Program.cs awaits Delay() twice, and if the timer is collected early those awaits never resume and the program sits there silently.</a:t>
+              <a:t>Why this matters for the challenge: requirement 9 says it directly: use Timer, keep it alive until it fires, dispose it from the callback. Steps 2, 3 and 6 all build on Delay(), and if the timer is collected early their continuations never run: Steps 2 and 3 time out and Step 6 fails, with no exception anywhere to explain why.</a:t>
             </a:r>
           </a:p>
           <a:p>
@@ -1390,7 +1390,7 @@
           </a:p>
           <a:p>
             <a:r>
-              <a:t>Why this matters for the challenge: because the starter's CustomTask already declares GetAwaiter(), the top-level await statements in Program.cs compile from the start with no changes to the compiler, no attributes and no registration. They start working the moment your GetAwaiter() returns a real CustomTaskAwaiter.</a:t>
+              <a:t>Why this matters for the challenge: because the starter's CustomTask already declares GetAwaiter(), the await statements in the Steps folder, starting with Step 3's mobile order, compile from the start with no changes to the compiler, no attributes and no registration. They start working the moment your GetAwaiter() returns a real CustomTaskAwaiter.</a:t>
             </a:r>
           </a:p>
           <a:p>
@@ -1489,7 +1489,7 @@
           </a:p>
           <a:p>
             <a:r>
-              <a:t>Build up to it in stages. The starter builds from the first minute, because every public member is already a stub, but running it stops at the first stub you have not replaced yet. Start with the fields and the shared completion method. Add ContinueWith(), because Wait() and the awaiter both register through it. Then Wait(), then Run(), then Delay(), then GetAwaiter(). At that point no stubs remain, and Program.cs runs all five steps as written.</a:t>
+              <a:t>Build up to it in stages. The starter builds from the first minute, because every public member is already a stub, but running it stops at the first stub you have not replaced yet. Start with the fields, IsCompleted, and the shared completion method behind SetResult() and SetException(). Add ContinueWith(), because Wait() and the awaiter both register through it. Then Wait(), then Run(), then Delay(), then GetAwaiter(). At that point no stubs remain, and the app checks your real code instead of stopping at a stub: Steps 1 to 5 as it starts, and Step 6 when you run it from its own page.</a:t>
             </a:r>
           </a:p>
           <a:p>
@@ -1497,7 +1497,7 @@
           </a:p>
           <a:p>
             <a:r>
-              <a:t>Test as you go, in temporary code at the bottom of Program.cs that you delete before comparing with 2. Finish. Chain two ContinueWith() calls, then Wait() on the task the second one returned; if that Wait() never returns, the returned task is never being completed. For two waiters, and for the several-thousand-link chain, build the chain on top of CustomTask.Delay(TimeSpan.FromSeconds(1)) so nothing has completed while you are still registering. Starting from an already completed task makes the test depend on how fast the pool drains the chain behind you, and a stack overflow you cannot reproduce is worse than one you can.</a:t>
+              <a:t>The app does the testing this time, so there is no test code to write. Stop the app and run it again after each change to CustomTask.cs, and open a step to compare every expected result with what actually happened. Step 2 chains two ContinueWith() calls, then calls Wait() on the task the second one returned; if that Wait() never returns, the returned task is never being completed. Step 6 builds its two waiting customers and its 10,000-link chain on top of CustomTask.Delay() so nothing has completed while it is still registering. Starting from an already completed task would make the test depend on how fast the pool drains the chain, and a stack overflow you cannot reproduce is worse than one you can. A stack overflow also ends the whole process, which is why Step 6 runs only when you click Run step on its page.</a:t>
             </a:r>
           </a:p>
           <a:p>
@@ -1593,7 +1593,7 @@
           <a:lstStyle/>
           <a:p>
             <a:r>
-              <a:t>Forty-five minutes, with the afternoon break in the middle. Open 4. Creating Custom Implementation of Task/1. Start/CreatingTaskFromScratch.slnx and run it once. It builds, but it stops at the first NotImplementedException, and that is expected: every public member of CustomTask is already a stub, and each stub's message is a hint about what that member needs to do.</a:t>
+              <a:t>Forty-five minutes, with the afternoon break in the middle. Open 4. Creating Custom Implementation of Task/1. Start/CoffeeShop.slnx, run it, and open http://localhost:5015. It builds, but the Home page stops at Step 1 and names the first member that still throws NotImplementedException, and that is expected: every public member of CustomTask is already a stub, and each stub's message, also in the terminal, is a hint about what that member needs to do.</a:t>
             </a:r>
           </a:p>
           <a:p>
@@ -1601,7 +1601,7 @@
           </a:p>
           <a:p>
             <a:r>
-              <a:t>Two files are already finished. CustomTaskAwaiter.cs is the bridge from the previous slides; read it, do not edit it. Program.cs already calls every public member of CustomTask in five numbered steps, and its comments explain what each member should do. Use it as your guide: it is what you are building towards, so finish with it exactly as you found it. Temporary test code at the bottom of it while you work is fine and expected; delete it before you compare with 2. Finish. Everything else you write goes in CustomTask.cs.</a:t>
+              <a:t>Every other file is already finished. CustomTaskAwaiter.cs is the bridge from the previous slides; read it, do not edit it. The Steps folder calls every public member of CustomTask through six coffee shop features, and the app walks you through them one step at a time: each step page tells the story behind the feature, names the real .NET API it mirrors, and shows every expected result next to what actually happened. A step unlocks only after the step before it passes. Use the steps as your guide, and finish with every file except CustomTask.cs exactly as you found it. Everything you write goes in CustomTask.cs.</a:t>
             </a:r>
           </a:p>
           <a:p>
@@ -1617,7 +1617,7 @@
           </a:p>
           <a:p>
             <a:r>
-              <a:t>You are done when the solution builds and Program.cs runs all five steps with the output its comments describe, a continuation runs after the first task completes, chaining ContinueWith() on the task returned by ContinueWith() does not wait forever, two callers waiting on the same incomplete task both resume, and a chain of several thousand ContinueWith() calls finishes without a stack overflow.</a:t>
+              <a:t>You are done when CoffeeShop.slnx builds, Steps 1 to 5 show as passed on the Home page after the app starts, Step 6 passes when you run it from its page, a continuation runs after the first task completes, chaining ContinueWith() on the task returned by ContinueWith() does not wait forever, two callers waiting on the same incomplete task both resume, and a chain of several thousand ContinueWith() calls finishes without a stack overflow.</a:t>
             </a:r>
           </a:p>
           <a:p>
@@ -1719,7 +1719,7 @@
           </a:p>
           <a:p>
             <a:r>
-              <a:t>Why this matters for the challenge: Program.cs prints the Starting Thread Id and then a thread Id from inside each CustomTask. Those three Ids come from Thread Pool threads, never from the CustomTask object itself. If your design ever needs the CustomTask to "be" a thread, come back to this slide.</a:t>
+              <a:t>Why this matters for the challenge: Step 1 checks that the receipt renders on a thread pool thread, never on the thread that called Run(), and Step 2 checks that the continuation after Delay() runs on a thread pool thread too. Those threads come from the Thread Pool, never from the CustomTask object itself. If your design ever needs the CustomTask to "be" a thread, come back to this slide.</a:t>
             </a:r>
           </a:p>
           <a:p>
@@ -2017,56 +2017,22 @@
             </a:r>
             <a:r>
               <a:rPr dirty="0"/>
-              <a:t> and restores it on the pool thread before your delegate runs, exactly the Capture() and Run() pair from the .NET Internals deck. </a:t>
-            </a:r>
-            <a:r>
-              <a:rPr dirty="0" err="1"/>
-              <a:t>UnsafeQueueUserWorkItem</a:t>
-            </a:r>
+              <a:t> and restores it on the pool thread before your delegate runs, exactly the Capture() and Run() pair from the .NET Internals deck. For Run() itself this is the version you want, because the caller's ambient state (culture, principal, AsyncLocal values) should flow into the work, just like the real Task.Run().</a:t>
+            </a:r>
+          </a:p>
+          <a:p>
             <a:r>
               <a:rPr dirty="0"/>
-              <a:t>() skips that capture. For Run() itself the plain version is what you want, because the caller's ambient state (culture, principal, </a:t>
-            </a:r>
-            <a:r>
-              <a:rPr dirty="0" err="1"/>
-              <a:t>AsyncLocal</a:t>
-            </a:r>
+              <a:t>• ThreadPool.UnsafeQueueUserWorkItem does not: it skips that capture. Hold on to the Unsafe variant; it comes back on the ExecutionContext slide.</a:t>
+            </a:r>
+          </a:p>
+          <a:p>
+            <a:endParaRPr dirty="0"/>
+          </a:p>
+          <a:p>
             <a:r>
               <a:rPr dirty="0"/>
-              <a:t> values) should flow into the work, just like the real </a:t>
-            </a:r>
-            <a:r>
-              <a:rPr dirty="0" err="1"/>
-              <a:t>Task.Run</a:t>
-            </a:r>
-            <a:r>
-              <a:rPr dirty="0"/>
-              <a:t>(). Hold on to the Unsafe variant; it comes back on the </a:t>
-            </a:r>
-            <a:r>
-              <a:rPr dirty="0" err="1"/>
-              <a:t>ExecutionContext</a:t>
-            </a:r>
-            <a:r>
-              <a:rPr dirty="0"/>
-              <a:t> slide.</a:t>
-            </a:r>
-          </a:p>
-          <a:p>
-            <a:endParaRPr dirty="0"/>
-          </a:p>
-          <a:p>
-            <a:r>
-              <a:rPr dirty="0"/>
-              <a:t>Why this matters for the challenge: requirement 3 is Run(Action) on the Thread Pool, and acceptance check 2 runs Step 1 of </a:t>
-            </a:r>
-            <a:r>
-              <a:rPr dirty="0" err="1"/>
-              <a:t>Program.cs</a:t>
-            </a:r>
-            <a:r>
-              <a:rPr dirty="0"/>
-              <a:t>, where the Run() action prints a thread pool Thread Id instead of the main thread's: the visible proof that the work left the starting thread.</a:t>
+              <a:t>Why this matters for the challenge: requirement 3 is Run(Action) on the Thread Pool, and Step 1, printing the receipt, checks that the Run() action renders the receipt on a thread pool thread, never on the thread that called Run(), and its log shows each Thread Id: the visible proof that the work left the starting thread.</a:t>
             </a:r>
           </a:p>
           <a:p>
@@ -2251,7 +2217,7 @@
           </a:p>
           <a:p>
             <a:r>
-              <a:t>Why this matters for the challenge: ContinueWith(Action) (requirement 4) returns a new CustomTask that represents the continuation itself, not the original task. That returned task is how chaining works, and it must complete when the continuation finishes: with the SetResult() method when the action returns and the SetException() method when it throws. Those two are yours to write, and the Completion slide in two slides' time defines them. Skip that and acceptance check 4, chaining ContinueWith() on the task ContinueWith() returned, waits forever.</a:t>
+              <a:t>Why this matters for the challenge: ContinueWith(Action) (requirement 4) returns a new CustomTask that represents the continuation itself, not the original task. That returned task is how chaining works, and it must complete when the continuation finishes: with the SetResult() method when the action returns and the SetException() method when it throws. Those two are yours to write, and the Completion slide in two slides' time defines them. Skip that and Step 2, brewing a pour-over, never finishes: it chains a second ContinueWith() onto the task the first one returned and calls Wait() on the last link, so the app stops at Step 2 with a timeout.</a:t>
             </a:r>
           </a:p>
           <a:p>
@@ -2357,17 +2323,15 @@
           </a:p>
           <a:p>
             <a:r>
-              <a:t>• A single Action field keeps only the last one: if you store the pending continuation in one field, every registration before completion overwrites the previous one. In the snippet, "First" is silently dropped, so the task ContinueWith() returned for it never completes, and first.Wait() blocks forever. Acceptance check 5, two callers waiting on the same incomplete CustomTask, catches exactly this.</a:t>
-            </a:r>
-          </a:p>
-          <a:p>
-            <a:r>
-              <a:t>• Keep a list; drain it when the Task completes: store every pending continuation, and on completion run all of them. The next slide covers how to drain it safely.</a:t>
-            </a:r>
-          </a:p>
-          <a:p>
-            <a:r>
-              <a:t>• Check-then-register must be atomic: ContinueWith() reads the completed flag and then either schedules or stores. If the Task completes between those two steps, the stored continuation is never run. The read and the write have to happen under one lock. A ConcurrentQueue&lt;T&gt; would make the add thread safe, but it cannot make check-then-add atomic, so a plain List&lt;T&gt; under the lock is the simpler, correct container. .NET 9 added System.Threading.Lock, a dedicated lock object that the lock statement understands; declare it once as a readonly field and use the ordinary statement. Tomorrow morning's Asynchronous vs Parallel deck goes deeper on Lock, Interlocked and SemaphoreSlim.</a:t>
+              <a:t>• A single Action field keeps only the last one: if you store the pending continuation in one field, every registration before completion overwrites the previous one. In the snippet, "First" is silently dropped, so the task ContinueWith() returned for it never completes, and first.Wait() blocks forever. Step 6, rush hour, catches exactly this: two customers waiting on the same incomplete CustomTask must both be served.</a:t>
+            </a:r>
+          </a:p>
+          <a:p>
+            <a:r>
+              <a:t>• Keep a list of Continuations, execute them when the Task completes: store every pending continuation, and on completion run all of them; the next slide covers how to drain the list safely. Check-then-register must be atomic, too: ContinueWith() reads</a:t>
+            </a:r>
+            <a:r>
+              <a:t> the completed flag and then either schedules or stores. If the Task completes between those two steps, the stored continuation is never run. The read and the write have to happen under one lock. A ConcurrentQueue&lt;T&gt; would make the add thread safe, but it cannot make check-then-add atomic, so a plain List&lt;T&gt; under the lock is the simpler, correct container. .NET 9 added System.Threading.Lock, a dedicated lock object that the lock statement understands; declare it once as a readonly field and use the ordinary statement. Tomorrow morning's Asynchronous vs Parallel deck goes deeper on Lock, Interlocked and SemaphoreSlim.</a:t>
             </a:r>
           </a:p>
           <a:p>
@@ -2383,7 +2347,7 @@
           </a:p>
           <a:p>
             <a:r>
-              <a:t>Why this matters for the challenge: requirement 5, multiple pending continuations, and requirement 1, completion state that is safe across threads, are the two halves of this slide. The snippet is also a test worth running. Add it to Program.cs temporarily while you work, and delete it before you compare with 2. Finish. Start from CustomTask.Delay() so the task is still pending when both continuations register.</a:t>
+              <a:t>Why this matters for the challenge: requirement 5, multiple pending continuations, and requirement 1, completion state that is safe across threads, are the two halves of this slide. Step 6 runs almost the same test, with two customers instead of two Console.WriteLine() calls, and instead of calling Wait(), it waits for both returned tasks to complete, then checks that both customers were served. Like the snippet, it starts from CustomTask.Delay() so the task is still pending when both continuations register.</a:t>
             </a:r>
           </a:p>
           <a:p>
@@ -2595,7 +2559,7 @@
           <a:lstStyle/>
           <a:p>
             <a:r>
-              <a:t>This is the direct payoff of the last hour. In the ExecutionContext challenge you set a culture, a principal and an AsyncLocal value on the main thread, captured the context with ExecutionContext.Capture(), and ran a callback on a background thread with ExecutionContext.Run(). The background thread saw the main thread's values. Then you wrapped Task.Run() in SuppressFlow() and the values disappeared. Now you build the mechanism that made that happen, automatically, for every continuation.</a:t>
+              <a:t>This is the direct payoff of the last hour. In Step 2 of the .NET Internals lab, the ExecutionContext experiment set a culture, a principal and an AsyncLocal value on the main thread, captured the context with ExecutionContext.Capture(), and ran a callback on a background thread with ExecutionContext.Run(). The background thread saw the main thread's values. Then the task created inside SuppressFlow() saw only default values. Now you build the mechanism that made that happen, automatically, for every continuation.</a:t>
             </a:r>
           </a:p>
           <a:p>
@@ -2608,17 +2572,15 @@
           </a:p>
           <a:p>
             <a:r>
-              <a:t>• Same Capture() + Run() as the .NET Internals deck: Capture() takes a snapshot of the current thread's ambient state. Run(context, callback, state) restores that snapshot on whatever thread ends up running the callback, runs it, then puts the thread's previous context back.</a:t>
-            </a:r>
-          </a:p>
-          <a:p>
-            <a:r>
-              <a:t>• Capture on register: that caller's state is what matters. Two threads have a stake in every continuation, the one that registered it and the one that completed the task. Only the first one matters. The code after an await expects the ambient state it had before the await, not the culture or principal of whichever pool thread happened to finish the work. So call Capture() at the moment a continuation is registered, and store the snapshot next to the continuation so the two travel together.</a:t>
-            </a:r>
-          </a:p>
-          <a:p>
-            <a:r>
-              <a:t>• Null context: still queue it, just skip Run(): Capture() returns null when the registering thread had SuppressFlow() active. That is not an error, it is the caller asking for no ambient state to travel. The continuation is still queued like every other one, and the only difference is that you invoke the delegate without wrapping it in ExecutionContext.Run(), so it runs on the pool thread's default context.</a:t>
+              <a:t>• Capture when Task is registered: this is the same Capture() + Run() pair as the .NET Internals deck. Capture() takes a snapshot of the current thread's ambient state. Run(context, callback, state) restores that snapshot on whatever thread ends up running the callback, runs it, then puts the thread's previous context back. Two threads</a:t>
+            </a:r>
+            <a:r>
+              <a:t> have a stake in every continuation, the one that registered it and the one that completed the task. Only the first one matters. The code after an await expects the ambient state it had before the await, not the culture or principal of whichever pool thread happened to finish the work. So call Capture() at the moment a continuation is registered, and store the snapshot next to the continuation so the two travel together.</a:t>
+            </a:r>
+          </a:p>
+          <a:p>
+            <a:r>
+              <a:t>• When Null, Run Continuation: Capture() returns null when the registering thread had SuppressFlow() active. That is not an error, it is the caller asking for no ambient state to travel. The continuation is still queued like every other one, and the only difference is that you invoke the delegate without wrapping it in ExecutionContext.Run(), so it runs on the pool thread's default context.</a:t>
             </a:r>
           </a:p>
           <a:p>
@@ -2742,12 +2704,10 @@
           </a:p>
           <a:p>
             <a:r>
-              <a:t>• throw ex; resets the stack trace: the trap is how you rethrow. Writing throw on the waiting thread rewrites the trace to that line, so the frames that pointed at the real bug are gone.</a:t>
-            </a:r>
-          </a:p>
-          <a:p>
-            <a:r>
-              <a:t>• ExceptionDispatchInfo preserves it: ExceptionDispatchInfo, in System.Runtime.ExceptionServices, exists for exactly this. Throw(exception) rethrows while keeping the captured trace and appends the new frames underneath. ExceptionDispatchInfo.Capture(exception).Throw() is the older two-step form and does the same thing. That using is already at the top of the starter CustomTask.cs, which is a hint.</a:t>
+              <a:t>• Always use ExceptionDispatchInfo to preserve Stack Trace, because throw ex; resets it: the trap is how you rethrow. Writing throw on the waiting thread rewrites the trace to that line, so the frames that pointed at the real bug are gone. ExceptionDispatchInfo, in System.Runtime.ExceptionServices, exists for exactly this.</a:t>
+            </a:r>
+            <a:r>
+              <a:t> Throw(exception) rethrows while keeping the captured trace and appends the new frames underneath. ExceptionDispatchInfo.Capture(exception).Throw() is the older two-step form and does the same thing. That using is already at the top of the starter CustomTask.cs, which is a hint.</a:t>
             </a:r>
           </a:p>
           <a:p>
@@ -2763,7 +2723,7 @@
           </a:p>
           <a:p>
             <a:r>
-              <a:t>Why this matters for the challenge: requirement 2, store exceptions and rethrow them without losing the original stack trace. Test it: Run() an action that throws, Wait() on the task, and check that the trace still points at the line inside the action.</a:t>
+              <a:t>Why this matters for the challenge: requirement 2, store exceptions and rethrow them without losing the original stack trace. Step 5 tests it: the grinder throws inside Run(), Wait() rethrows, and the check expects the stack trace to still include CoffeeGrinder.Grind(), where the exception was thrown.</a:t>
             </a:r>
           </a:p>
           <a:p>
@@ -9417,7 +9377,7 @@
                   <a:lin ang="5400000" scaled="0"/>
                 </a:gradFill>
               </a:rPr>
-              <a:t>CreatingTaskFromScratch, 45 minutes</a:t>
+              <a:t>CoffeeShop, 45 minutes</a:t>
             </a:r>
             <a:endParaRPr lang="en-US" sz="4000" dirty="0">
               <a:gradFill>
@@ -9464,14 +9424,14 @@
             <a:pPr lvl="1"/>
             <a:r>
               <a:rPr lang="en-US" dirty="0"/>
-              <a:t>Provided: `CustomTaskAwaiter.cs`, `Program.cs`, `CustomTask` stubs</a:t>
+              <a:t>Provided: `CustomTaskAwaiter.cs`, `Steps` folder, `CustomTask` stubs</a:t>
             </a:r>
           </a:p>
           <a:p>
             <a:pPr lvl="1"/>
             <a:r>
               <a:rPr lang="en-US" dirty="0"/>
-              <a:t>`Program.cs` runs all five steps, as its comments describe</a:t>
+              <a:t>Steps 1-5 pass on startup; Step 6 passes from its own page</a:t>
             </a:r>
           </a:p>
           <a:p>
@@ -10177,7 +10137,7 @@
             <a:pPr lvl="1"/>
             <a:r>
               <a:rPr lang="en-US" sz="2000" dirty="0"/>
-              <a:t>Execute the continuations it when the `Task` completes</a:t>
+              <a:t>Execute the continuations when the `Task` completes</a:t>
             </a:r>
           </a:p>
         </p:txBody>
